--- a/docs/keon_app_focus_BE.pptx
+++ b/docs/keon_app_focus_BE.pptx
@@ -6,6 +6,8 @@
   </p:sldMasterIdLst>
   <p:sldIdLst>
     <p:sldId id="256" r:id="rId7"/>
+    <p:sldId id="257" r:id="rId8"/>
+    <p:sldId id="258" r:id="rId9"/>
   </p:sldIdLst>
   <p:sldSz cx="12191695" cy="6858000" type="screen4x3"/>
   <p:notesSz cx="6858000" cy="9144000"/>
@@ -3200,7 +3202,7 @@
           <a:p>
             <a:pPr algn="l"/>
             <a:r>
-              <a:rPr sz="2400" b="1">
+              <a:rPr sz="2400" b="1" i="0">
                 <a:solidFill>
                   <a:srgbClr val="0F1F3D"/>
                 </a:solidFill>
@@ -3235,7 +3237,7 @@
           <a:p>
             <a:pPr algn="l"/>
             <a:r>
-              <a:rPr sz="1200" b="0">
+              <a:rPr sz="1200" b="0" i="0">
                 <a:solidFill>
                   <a:srgbClr val="64748B"/>
                 </a:solidFill>
@@ -3362,7 +3364,7 @@
           <a:p>
             <a:pPr algn="l"/>
             <a:r>
-              <a:rPr sz="1500" b="1">
+              <a:rPr sz="1500" b="1" i="0">
                 <a:solidFill>
                   <a:srgbClr val="2C5FF0"/>
                 </a:solidFill>
@@ -3397,7 +3399,7 @@
           <a:p>
             <a:pPr algn="l"/>
             <a:r>
-              <a:rPr sz="1000" b="0">
+              <a:rPr sz="1000" b="0" i="0">
                 <a:solidFill>
                   <a:srgbClr val="1E293B"/>
                 </a:solidFill>
@@ -3432,7 +3434,7 @@
           <a:p>
             <a:pPr algn="l"/>
             <a:r>
-              <a:rPr sz="1100" b="1">
+              <a:rPr sz="1100" b="1" i="0">
                 <a:solidFill>
                   <a:srgbClr val="0F1F3D"/>
                 </a:solidFill>
@@ -3559,7 +3561,7 @@
           <a:p>
             <a:pPr algn="l"/>
             <a:r>
-              <a:rPr sz="1000" b="1">
+              <a:rPr sz="1000" b="1" i="0">
                 <a:solidFill>
                   <a:srgbClr val="0F1F3D"/>
                 </a:solidFill>
@@ -3594,7 +3596,7 @@
           <a:p>
             <a:pPr algn="l"/>
             <a:r>
-              <a:rPr sz="800" b="0">
+              <a:rPr sz="800" b="0" i="0">
                 <a:solidFill>
                   <a:srgbClr val="64748B"/>
                 </a:solidFill>
@@ -3721,7 +3723,7 @@
           <a:p>
             <a:pPr algn="l"/>
             <a:r>
-              <a:rPr sz="1000" b="1">
+              <a:rPr sz="1000" b="1" i="0">
                 <a:solidFill>
                   <a:srgbClr val="0F1F3D"/>
                 </a:solidFill>
@@ -3756,7 +3758,7 @@
           <a:p>
             <a:pPr algn="l"/>
             <a:r>
-              <a:rPr sz="800" b="0">
+              <a:rPr sz="800" b="0" i="0">
                 <a:solidFill>
                   <a:srgbClr val="64748B"/>
                 </a:solidFill>
@@ -3883,7 +3885,7 @@
           <a:p>
             <a:pPr algn="l"/>
             <a:r>
-              <a:rPr sz="1000" b="1">
+              <a:rPr sz="1000" b="1" i="0">
                 <a:solidFill>
                   <a:srgbClr val="0F1F3D"/>
                 </a:solidFill>
@@ -3918,7 +3920,7 @@
           <a:p>
             <a:pPr algn="l"/>
             <a:r>
-              <a:rPr sz="800" b="0">
+              <a:rPr sz="800" b="0" i="0">
                 <a:solidFill>
                   <a:srgbClr val="64748B"/>
                 </a:solidFill>
@@ -4045,7 +4047,7 @@
           <a:p>
             <a:pPr algn="l"/>
             <a:r>
-              <a:rPr sz="1000" b="1">
+              <a:rPr sz="1000" b="1" i="0">
                 <a:solidFill>
                   <a:srgbClr val="0F1F3D"/>
                 </a:solidFill>
@@ -4080,7 +4082,7 @@
           <a:p>
             <a:pPr algn="l"/>
             <a:r>
-              <a:rPr sz="800" b="0">
+              <a:rPr sz="800" b="0" i="0">
                 <a:solidFill>
                   <a:srgbClr val="64748B"/>
                 </a:solidFill>
@@ -4207,7 +4209,7 @@
           <a:p>
             <a:pPr algn="l"/>
             <a:r>
-              <a:rPr sz="1000" b="1">
+              <a:rPr sz="1000" b="1" i="0">
                 <a:solidFill>
                   <a:srgbClr val="0F1F3D"/>
                 </a:solidFill>
@@ -4242,7 +4244,7 @@
           <a:p>
             <a:pPr algn="l"/>
             <a:r>
-              <a:rPr sz="800" b="0">
+              <a:rPr sz="800" b="0" i="0">
                 <a:solidFill>
                   <a:srgbClr val="64748B"/>
                 </a:solidFill>
@@ -4369,7 +4371,7 @@
           <a:p>
             <a:pPr algn="l"/>
             <a:r>
-              <a:rPr sz="1000" b="1">
+              <a:rPr sz="1000" b="1" i="0">
                 <a:solidFill>
                   <a:srgbClr val="0F1F3D"/>
                 </a:solidFill>
@@ -4404,7 +4406,7 @@
           <a:p>
             <a:pPr algn="l"/>
             <a:r>
-              <a:rPr sz="800" b="0">
+              <a:rPr sz="800" b="0" i="0">
                 <a:solidFill>
                   <a:srgbClr val="64748B"/>
                 </a:solidFill>
@@ -4439,7 +4441,7 @@
           <a:p>
             <a:pPr algn="l"/>
             <a:r>
-              <a:rPr sz="1100" b="1">
+              <a:rPr sz="1100" b="1" i="0">
                 <a:solidFill>
                   <a:srgbClr val="0F1F3D"/>
                 </a:solidFill>
@@ -4670,7 +4672,7 @@
           <a:p>
             <a:pPr algn="l"/>
             <a:r>
-              <a:rPr sz="1500" b="1">
+              <a:rPr sz="1500" b="1" i="0">
                 <a:solidFill>
                   <a:srgbClr val="6D28D9"/>
                 </a:solidFill>
@@ -4705,7 +4707,7 @@
           <a:p>
             <a:pPr algn="l"/>
             <a:r>
-              <a:rPr sz="1100" b="1">
+              <a:rPr sz="1100" b="1" i="0">
                 <a:solidFill>
                   <a:srgbClr val="0F1F3D"/>
                 </a:solidFill>
@@ -4863,7 +4865,7 @@
           <a:p>
             <a:pPr algn="l"/>
             <a:r>
-              <a:rPr sz="1100" b="1">
+              <a:rPr sz="1100" b="1" i="0">
                 <a:solidFill>
                   <a:srgbClr val="0F1F3D"/>
                 </a:solidFill>
@@ -4946,7 +4948,7 @@
           <a:p>
             <a:pPr algn="ctr"/>
             <a:r>
-              <a:rPr sz="800" b="1">
+              <a:rPr sz="800" b="1" i="0">
                 <a:solidFill>
                   <a:srgbClr val="6D28D9"/>
                 </a:solidFill>
@@ -5029,7 +5031,7 @@
           <a:p>
             <a:pPr algn="ctr"/>
             <a:r>
-              <a:rPr sz="800" b="1">
+              <a:rPr sz="800" b="1" i="0">
                 <a:solidFill>
                   <a:srgbClr val="6D28D9"/>
                 </a:solidFill>
@@ -5112,7 +5114,7 @@
           <a:p>
             <a:pPr algn="ctr"/>
             <a:r>
-              <a:rPr sz="800" b="1">
+              <a:rPr sz="800" b="1" i="0">
                 <a:solidFill>
                   <a:srgbClr val="6D28D9"/>
                 </a:solidFill>
@@ -5195,7 +5197,7 @@
           <a:p>
             <a:pPr algn="ctr"/>
             <a:r>
-              <a:rPr sz="800" b="1">
+              <a:rPr sz="800" b="1" i="0">
                 <a:solidFill>
                   <a:srgbClr val="6D28D9"/>
                 </a:solidFill>
@@ -5278,7 +5280,7 @@
           <a:p>
             <a:pPr algn="ctr"/>
             <a:r>
-              <a:rPr sz="800" b="1">
+              <a:rPr sz="800" b="1" i="0">
                 <a:solidFill>
                   <a:srgbClr val="6D28D9"/>
                 </a:solidFill>
@@ -5361,7 +5363,7 @@
           <a:p>
             <a:pPr algn="ctr"/>
             <a:r>
-              <a:rPr sz="800" b="1">
+              <a:rPr sz="800" b="1" i="0">
                 <a:solidFill>
                   <a:srgbClr val="6D28D9"/>
                 </a:solidFill>
@@ -5381,7 +5383,7 @@
         <p:spPr>
           <a:xfrm>
             <a:off x="11804904" y="3538728"/>
-            <a:ext cx="1005840" cy="292608"/>
+            <a:ext cx="841248" cy="292608"/>
           </a:xfrm>
           <a:prstGeom prst="roundRect">
             <a:avLst>
@@ -5429,7 +5431,7 @@
         <p:spPr>
           <a:xfrm>
             <a:off x="11804904" y="3529584"/>
-            <a:ext cx="1005840" cy="310896"/>
+            <a:ext cx="841248" cy="310896"/>
           </a:xfrm>
           <a:prstGeom prst="rect">
             <a:avLst/>
@@ -5444,13 +5446,13 @@
           <a:p>
             <a:pPr algn="ctr"/>
             <a:r>
-              <a:rPr sz="800" b="1">
+              <a:rPr sz="800" b="1" i="0">
                 <a:solidFill>
                   <a:srgbClr val="6D28D9"/>
                 </a:solidFill>
                 <a:latin typeface="Calibri"/>
               </a:rPr>
-              <a:t>Synthèse Keon</a:t>
+              <a:t>Synthèse</a:t>
             </a:r>
           </a:p>
         </p:txBody>
@@ -5479,7 +5481,7 @@
           <a:p>
             <a:pPr algn="l"/>
             <a:r>
-              <a:rPr sz="1100" b="1">
+              <a:rPr sz="1100" b="1" i="0">
                 <a:solidFill>
                   <a:srgbClr val="0F1F3D"/>
                 </a:solidFill>
@@ -5560,7 +5562,7 @@
           <a:p>
             <a:pPr algn="ctr"/>
             <a:r>
-              <a:rPr sz="900" b="1">
+              <a:rPr sz="900" b="1" i="0">
                 <a:solidFill>
                   <a:srgbClr val="FFFFFF"/>
                 </a:solidFill>
@@ -5684,7 +5686,7 @@
           <a:p>
             <a:pPr algn="ctr"/>
             <a:r>
-              <a:rPr sz="900" b="1">
+              <a:rPr sz="900" b="1" i="0">
                 <a:solidFill>
                   <a:srgbClr val="FFFFFF"/>
                 </a:solidFill>
@@ -5808,7 +5810,7 @@
           <a:p>
             <a:pPr algn="ctr"/>
             <a:r>
-              <a:rPr sz="900" b="1">
+              <a:rPr sz="900" b="1" i="0">
                 <a:solidFill>
                   <a:srgbClr val="FFFFFF"/>
                 </a:solidFill>
@@ -5932,7 +5934,7 @@
           <a:p>
             <a:pPr algn="ctr"/>
             <a:r>
-              <a:rPr sz="900" b="1">
+              <a:rPr sz="900" b="1" i="0">
                 <a:solidFill>
                   <a:srgbClr val="FFFFFF"/>
                 </a:solidFill>
@@ -6056,7 +6058,7 @@
           <a:p>
             <a:pPr algn="ctr"/>
             <a:r>
-              <a:rPr sz="900" b="1">
+              <a:rPr sz="900" b="1" i="0">
                 <a:solidFill>
                   <a:srgbClr val="FFFFFF"/>
                 </a:solidFill>
@@ -6137,7 +6139,7 @@
           <a:p>
             <a:pPr algn="ctr"/>
             <a:r>
-              <a:rPr sz="900" b="1">
+              <a:rPr sz="900" b="1" i="0">
                 <a:solidFill>
                   <a:srgbClr val="FFFFFF"/>
                 </a:solidFill>
@@ -6261,7 +6263,7 @@
           <a:p>
             <a:pPr algn="ctr"/>
             <a:r>
-              <a:rPr sz="900" b="1">
+              <a:rPr sz="900" b="1" i="0">
                 <a:solidFill>
                   <a:srgbClr val="FFFFFF"/>
                 </a:solidFill>
@@ -6385,7 +6387,7 @@
           <a:p>
             <a:pPr algn="ctr"/>
             <a:r>
-              <a:rPr sz="900" b="1">
+              <a:rPr sz="900" b="1" i="0">
                 <a:solidFill>
                   <a:srgbClr val="FFFFFF"/>
                 </a:solidFill>
@@ -6509,7 +6511,7 @@
           <a:p>
             <a:pPr algn="ctr"/>
             <a:r>
-              <a:rPr sz="900" b="1">
+              <a:rPr sz="900" b="1" i="0">
                 <a:solidFill>
                   <a:srgbClr val="FFFFFF"/>
                 </a:solidFill>
@@ -6544,7 +6546,7 @@
           <a:p>
             <a:pPr algn="l"/>
             <a:r>
-              <a:rPr sz="800" b="0">
+              <a:rPr sz="800" b="0" i="0">
                 <a:solidFill>
                   <a:srgbClr val="64748B"/>
                 </a:solidFill>
@@ -6579,7 +6581,7 @@
           <a:p>
             <a:pPr algn="l"/>
             <a:r>
-              <a:rPr sz="1100" b="1">
+              <a:rPr sz="1100" b="1" i="0">
                 <a:solidFill>
                   <a:srgbClr val="0F1F3D"/>
                 </a:solidFill>
@@ -6662,7 +6664,7 @@
           <a:p>
             <a:pPr algn="l"/>
             <a:r>
-              <a:rPr sz="900" b="1">
+              <a:rPr sz="900" b="1" i="0">
                 <a:solidFill>
                   <a:srgbClr val="0F1F3D"/>
                 </a:solidFill>
@@ -6697,7 +6699,7 @@
           <a:p>
             <a:pPr algn="l"/>
             <a:r>
-              <a:rPr sz="800" b="0">
+              <a:rPr sz="800" b="0" i="0">
                 <a:solidFill>
                   <a:srgbClr val="64748B"/>
                 </a:solidFill>
@@ -6780,7 +6782,7 @@
           <a:p>
             <a:pPr algn="l"/>
             <a:r>
-              <a:rPr sz="900" b="1">
+              <a:rPr sz="900" b="1" i="0">
                 <a:solidFill>
                   <a:srgbClr val="0F1F3D"/>
                 </a:solidFill>
@@ -6815,7 +6817,7 @@
           <a:p>
             <a:pPr algn="l"/>
             <a:r>
-              <a:rPr sz="800" b="0">
+              <a:rPr sz="800" b="0" i="0">
                 <a:solidFill>
                   <a:srgbClr val="64748B"/>
                 </a:solidFill>
@@ -6898,7 +6900,7 @@
           <a:p>
             <a:pPr algn="l"/>
             <a:r>
-              <a:rPr sz="900" b="1">
+              <a:rPr sz="900" b="1" i="0">
                 <a:solidFill>
                   <a:srgbClr val="0F1F3D"/>
                 </a:solidFill>
@@ -6933,7 +6935,7 @@
           <a:p>
             <a:pPr algn="l"/>
             <a:r>
-              <a:rPr sz="800" b="0">
+              <a:rPr sz="800" b="0" i="0">
                 <a:solidFill>
                   <a:srgbClr val="64748B"/>
                 </a:solidFill>
@@ -6968,13 +6970,4622 @@
           <a:p>
             <a:pPr algn="l"/>
             <a:r>
-              <a:rPr sz="800" b="0">
+              <a:rPr sz="800" b="0" i="0">
                 <a:solidFill>
                   <a:srgbClr val="64748B"/>
                 </a:solidFill>
                 <a:latin typeface="Calibri"/>
               </a:rPr>
               <a:t>Stack : React 18 · TypeScript · Vite · Tailwind · shadcn-ui · Supabase (Postgres + RLS + Realtime)</a:t>
+            </a:r>
+          </a:p>
+        </p:txBody>
+      </p:sp>
+    </p:spTree>
+  </p:cSld>
+  <p:clrMapOvr>
+    <a:masterClrMapping/>
+  </p:clrMapOvr>
+</p:sld>
+</file>
+
+<file path=ppt/slides/slide2.xml><?xml version="1.0" encoding="utf-8"?>
+<p:sld xmlns:a="http://schemas.openxmlformats.org/drawingml/2006/main" xmlns:p="http://schemas.openxmlformats.org/presentationml/2006/main" xmlns:r="http://schemas.openxmlformats.org/officeDocument/2006/relationships">
+  <p:cSld>
+    <p:spTree>
+      <p:nvGrpSpPr>
+        <p:cNvPr id="1" name=""/>
+        <p:cNvGrpSpPr/>
+        <p:nvPr/>
+      </p:nvGrpSpPr>
+      <p:grpSpPr/>
+      <p:sp>
+        <p:nvSpPr>
+          <p:cNvPr id="2" name="Rectangle 1"/>
+          <p:cNvSpPr/>
+          <p:nvPr/>
+        </p:nvSpPr>
+        <p:spPr>
+          <a:xfrm>
+            <a:off x="0" y="0"/>
+            <a:ext cx="12191695" cy="6858000"/>
+          </a:xfrm>
+          <a:prstGeom prst="rect">
+            <a:avLst/>
+          </a:prstGeom>
+          <a:solidFill>
+            <a:srgbClr val="FFFFFF"/>
+          </a:solidFill>
+          <a:ln>
+            <a:noFill/>
+          </a:ln>
+          <a:effectLst/>
+        </p:spPr>
+        <p:style>
+          <a:lnRef idx="1">
+            <a:schemeClr val="accent1"/>
+          </a:lnRef>
+          <a:fillRef idx="3">
+            <a:schemeClr val="accent1"/>
+          </a:fillRef>
+          <a:effectRef idx="2">
+            <a:schemeClr val="accent1"/>
+          </a:effectRef>
+          <a:fontRef idx="minor">
+            <a:schemeClr val="lt1"/>
+          </a:fontRef>
+        </p:style>
+        <p:txBody>
+          <a:bodyPr rtlCol="0" anchor="ctr"/>
+          <a:lstStyle/>
+          <a:p>
+            <a:pPr algn="ctr"/>
+          </a:p>
+        </p:txBody>
+      </p:sp>
+      <p:sp>
+        <p:nvSpPr>
+          <p:cNvPr id="3" name="Rectangle 2"/>
+          <p:cNvSpPr/>
+          <p:nvPr/>
+        </p:nvSpPr>
+        <p:spPr>
+          <a:xfrm>
+            <a:off x="0" y="0"/>
+            <a:ext cx="228600" cy="6858000"/>
+          </a:xfrm>
+          <a:prstGeom prst="rect">
+            <a:avLst/>
+          </a:prstGeom>
+          <a:solidFill>
+            <a:srgbClr val="6D28D9"/>
+          </a:solidFill>
+          <a:ln>
+            <a:noFill/>
+          </a:ln>
+          <a:effectLst/>
+        </p:spPr>
+        <p:style>
+          <a:lnRef idx="1">
+            <a:schemeClr val="accent1"/>
+          </a:lnRef>
+          <a:fillRef idx="3">
+            <a:schemeClr val="accent1"/>
+          </a:fillRef>
+          <a:effectRef idx="2">
+            <a:schemeClr val="accent1"/>
+          </a:effectRef>
+          <a:fontRef idx="minor">
+            <a:schemeClr val="lt1"/>
+          </a:fontRef>
+        </p:style>
+        <p:txBody>
+          <a:bodyPr rtlCol="0" anchor="ctr"/>
+          <a:lstStyle/>
+          <a:p>
+            <a:pPr algn="ctr"/>
+          </a:p>
+        </p:txBody>
+      </p:sp>
+      <p:sp>
+        <p:nvSpPr>
+          <p:cNvPr id="4" name="TextBox 3"/>
+          <p:cNvSpPr txBox="1"/>
+          <p:nvPr/>
+        </p:nvSpPr>
+        <p:spPr>
+          <a:xfrm>
+            <a:off x="502920" y="274320"/>
+            <a:ext cx="10058400" cy="457200"/>
+          </a:xfrm>
+          <a:prstGeom prst="rect">
+            <a:avLst/>
+          </a:prstGeom>
+          <a:noFill/>
+        </p:spPr>
+        <p:txBody>
+          <a:bodyPr wrap="square" lIns="0" rIns="0" tIns="0" bIns="0" anchor="t">
+            <a:spAutoFit/>
+          </a:bodyPr>
+          <a:lstStyle/>
+          <a:p>
+            <a:pPr algn="l"/>
+            <a:r>
+              <a:rPr sz="2400" b="1" i="0">
+                <a:solidFill>
+                  <a:srgbClr val="0F1F3D"/>
+                </a:solidFill>
+                <a:latin typeface="Calibri"/>
+              </a:rPr>
+              <a:t>Flux BE — Catalogue des prestations</a:t>
+            </a:r>
+          </a:p>
+        </p:txBody>
+      </p:sp>
+      <p:sp>
+        <p:nvSpPr>
+          <p:cNvPr id="5" name="TextBox 4"/>
+          <p:cNvSpPr txBox="1"/>
+          <p:nvPr/>
+        </p:nvSpPr>
+        <p:spPr>
+          <a:xfrm>
+            <a:off x="502920" y="713232"/>
+            <a:ext cx="10058400" cy="320040"/>
+          </a:xfrm>
+          <a:prstGeom prst="rect">
+            <a:avLst/>
+          </a:prstGeom>
+          <a:noFill/>
+        </p:spPr>
+        <p:txBody>
+          <a:bodyPr wrap="square" lIns="0" rIns="0" tIns="0" bIns="0" anchor="t">
+            <a:spAutoFit/>
+          </a:bodyPr>
+          <a:lstStyle/>
+          <a:p>
+            <a:pPr algn="l"/>
+            <a:r>
+              <a:rPr sz="1200" b="0" i="0">
+                <a:solidFill>
+                  <a:srgbClr val="64748B"/>
+                </a:solidFill>
+                <a:latin typeface="Calibri"/>
+              </a:rPr>
+              <a:t>12 familles livrables par le Bureau d'Études, déclenchées via les sub-process templates</a:t>
+            </a:r>
+          </a:p>
+        </p:txBody>
+      </p:sp>
+      <p:sp>
+        <p:nvSpPr>
+          <p:cNvPr id="6" name="Rectangle 5"/>
+          <p:cNvSpPr/>
+          <p:nvPr/>
+        </p:nvSpPr>
+        <p:spPr>
+          <a:xfrm>
+            <a:off x="502920" y="1097280"/>
+            <a:ext cx="11201400" cy="12700"/>
+          </a:xfrm>
+          <a:prstGeom prst="rect">
+            <a:avLst/>
+          </a:prstGeom>
+          <a:solidFill>
+            <a:srgbClr val="CBD5E1"/>
+          </a:solidFill>
+          <a:ln>
+            <a:noFill/>
+          </a:ln>
+          <a:effectLst/>
+        </p:spPr>
+        <p:style>
+          <a:lnRef idx="1">
+            <a:schemeClr val="accent1"/>
+          </a:lnRef>
+          <a:fillRef idx="3">
+            <a:schemeClr val="accent1"/>
+          </a:fillRef>
+          <a:effectRef idx="2">
+            <a:schemeClr val="accent1"/>
+          </a:effectRef>
+          <a:fontRef idx="minor">
+            <a:schemeClr val="lt1"/>
+          </a:fontRef>
+        </p:style>
+        <p:txBody>
+          <a:bodyPr rtlCol="0" anchor="ctr"/>
+          <a:lstStyle/>
+          <a:p>
+            <a:pPr algn="ctr"/>
+          </a:p>
+        </p:txBody>
+      </p:sp>
+      <p:sp>
+        <p:nvSpPr>
+          <p:cNvPr id="7" name="Rounded Rectangle 6"/>
+          <p:cNvSpPr/>
+          <p:nvPr/>
+        </p:nvSpPr>
+        <p:spPr>
+          <a:xfrm>
+            <a:off x="502920" y="1417320"/>
+            <a:ext cx="2676906" cy="1399032"/>
+          </a:xfrm>
+          <a:prstGeom prst="roundRect">
+            <a:avLst>
+              <a:gd name="adj" fmla="val 6000"/>
+            </a:avLst>
+          </a:prstGeom>
+          <a:solidFill>
+            <a:srgbClr val="F1F5F9"/>
+          </a:solidFill>
+          <a:ln w="6350">
+            <a:solidFill>
+              <a:srgbClr val="CBD5E1"/>
+            </a:solidFill>
+          </a:ln>
+          <a:effectLst/>
+        </p:spPr>
+        <p:style>
+          <a:lnRef idx="1">
+            <a:schemeClr val="accent1"/>
+          </a:lnRef>
+          <a:fillRef idx="3">
+            <a:schemeClr val="accent1"/>
+          </a:fillRef>
+          <a:effectRef idx="2">
+            <a:schemeClr val="accent1"/>
+          </a:effectRef>
+          <a:fontRef idx="minor">
+            <a:schemeClr val="lt1"/>
+          </a:fontRef>
+        </p:style>
+        <p:txBody>
+          <a:bodyPr rtlCol="0" anchor="ctr"/>
+          <a:lstStyle/>
+          <a:p>
+            <a:pPr algn="ctr"/>
+          </a:p>
+        </p:txBody>
+      </p:sp>
+      <p:sp>
+        <p:nvSpPr>
+          <p:cNvPr id="8" name="Rectangle 7"/>
+          <p:cNvSpPr/>
+          <p:nvPr/>
+        </p:nvSpPr>
+        <p:spPr>
+          <a:xfrm>
+            <a:off x="502920" y="1417320"/>
+            <a:ext cx="2676906" cy="109728"/>
+          </a:xfrm>
+          <a:prstGeom prst="rect">
+            <a:avLst/>
+          </a:prstGeom>
+          <a:solidFill>
+            <a:srgbClr val="6D28D9"/>
+          </a:solidFill>
+          <a:ln>
+            <a:noFill/>
+          </a:ln>
+          <a:effectLst/>
+        </p:spPr>
+        <p:style>
+          <a:lnRef idx="1">
+            <a:schemeClr val="accent1"/>
+          </a:lnRef>
+          <a:fillRef idx="3">
+            <a:schemeClr val="accent1"/>
+          </a:fillRef>
+          <a:effectRef idx="2">
+            <a:schemeClr val="accent1"/>
+          </a:effectRef>
+          <a:fontRef idx="minor">
+            <a:schemeClr val="lt1"/>
+          </a:fontRef>
+        </p:style>
+        <p:txBody>
+          <a:bodyPr rtlCol="0" anchor="ctr"/>
+          <a:lstStyle/>
+          <a:p>
+            <a:pPr algn="ctr"/>
+          </a:p>
+        </p:txBody>
+      </p:sp>
+      <p:sp>
+        <p:nvSpPr>
+          <p:cNvPr id="9" name="TextBox 8"/>
+          <p:cNvSpPr txBox="1"/>
+          <p:nvPr/>
+        </p:nvSpPr>
+        <p:spPr>
+          <a:xfrm>
+            <a:off x="685800" y="1691640"/>
+            <a:ext cx="2311146" cy="411480"/>
+          </a:xfrm>
+          <a:prstGeom prst="rect">
+            <a:avLst/>
+          </a:prstGeom>
+          <a:noFill/>
+        </p:spPr>
+        <p:txBody>
+          <a:bodyPr wrap="square" lIns="0" rIns="0" tIns="0" bIns="0" anchor="t">
+            <a:spAutoFit/>
+          </a:bodyPr>
+          <a:lstStyle/>
+          <a:p>
+            <a:pPr algn="l"/>
+            <a:r>
+              <a:rPr sz="1100" b="1" i="0">
+                <a:solidFill>
+                  <a:srgbClr val="0F1F3D"/>
+                </a:solidFill>
+                <a:latin typeface="Calibri"/>
+              </a:rPr>
+              <a:t>ICPE Déclaration</a:t>
+            </a:r>
+          </a:p>
+        </p:txBody>
+      </p:sp>
+      <p:sp>
+        <p:nvSpPr>
+          <p:cNvPr id="10" name="TextBox 9"/>
+          <p:cNvSpPr txBox="1"/>
+          <p:nvPr/>
+        </p:nvSpPr>
+        <p:spPr>
+          <a:xfrm>
+            <a:off x="685800" y="2148840"/>
+            <a:ext cx="2311146" cy="576072"/>
+          </a:xfrm>
+          <a:prstGeom prst="rect">
+            <a:avLst/>
+          </a:prstGeom>
+          <a:noFill/>
+        </p:spPr>
+        <p:txBody>
+          <a:bodyPr wrap="square" lIns="0" rIns="0" tIns="0" bIns="0" anchor="t">
+            <a:spAutoFit/>
+          </a:bodyPr>
+          <a:lstStyle/>
+          <a:p>
+            <a:pPr algn="l"/>
+            <a:r>
+              <a:rPr sz="900" b="0" i="0">
+                <a:solidFill>
+                  <a:srgbClr val="1E293B"/>
+                </a:solidFill>
+                <a:latin typeface="Calibri"/>
+              </a:rPr>
+              <a:t>Dossier · plans · dépôt · preuve · complétude · purge</a:t>
+            </a:r>
+          </a:p>
+        </p:txBody>
+      </p:sp>
+      <p:sp>
+        <p:nvSpPr>
+          <p:cNvPr id="11" name="Rounded Rectangle 10"/>
+          <p:cNvSpPr/>
+          <p:nvPr/>
+        </p:nvSpPr>
+        <p:spPr>
+          <a:xfrm>
+            <a:off x="3344418" y="1417320"/>
+            <a:ext cx="2676906" cy="1399032"/>
+          </a:xfrm>
+          <a:prstGeom prst="roundRect">
+            <a:avLst>
+              <a:gd name="adj" fmla="val 6000"/>
+            </a:avLst>
+          </a:prstGeom>
+          <a:solidFill>
+            <a:srgbClr val="F1F5F9"/>
+          </a:solidFill>
+          <a:ln w="6350">
+            <a:solidFill>
+              <a:srgbClr val="CBD5E1"/>
+            </a:solidFill>
+          </a:ln>
+          <a:effectLst/>
+        </p:spPr>
+        <p:style>
+          <a:lnRef idx="1">
+            <a:schemeClr val="accent1"/>
+          </a:lnRef>
+          <a:fillRef idx="3">
+            <a:schemeClr val="accent1"/>
+          </a:fillRef>
+          <a:effectRef idx="2">
+            <a:schemeClr val="accent1"/>
+          </a:effectRef>
+          <a:fontRef idx="minor">
+            <a:schemeClr val="lt1"/>
+          </a:fontRef>
+        </p:style>
+        <p:txBody>
+          <a:bodyPr rtlCol="0" anchor="ctr"/>
+          <a:lstStyle/>
+          <a:p>
+            <a:pPr algn="ctr"/>
+          </a:p>
+        </p:txBody>
+      </p:sp>
+      <p:sp>
+        <p:nvSpPr>
+          <p:cNvPr id="12" name="Rectangle 11"/>
+          <p:cNvSpPr/>
+          <p:nvPr/>
+        </p:nvSpPr>
+        <p:spPr>
+          <a:xfrm>
+            <a:off x="3344418" y="1417320"/>
+            <a:ext cx="2676906" cy="109728"/>
+          </a:xfrm>
+          <a:prstGeom prst="rect">
+            <a:avLst/>
+          </a:prstGeom>
+          <a:solidFill>
+            <a:srgbClr val="6D28D9"/>
+          </a:solidFill>
+          <a:ln>
+            <a:noFill/>
+          </a:ln>
+          <a:effectLst/>
+        </p:spPr>
+        <p:style>
+          <a:lnRef idx="1">
+            <a:schemeClr val="accent1"/>
+          </a:lnRef>
+          <a:fillRef idx="3">
+            <a:schemeClr val="accent1"/>
+          </a:fillRef>
+          <a:effectRef idx="2">
+            <a:schemeClr val="accent1"/>
+          </a:effectRef>
+          <a:fontRef idx="minor">
+            <a:schemeClr val="lt1"/>
+          </a:fontRef>
+        </p:style>
+        <p:txBody>
+          <a:bodyPr rtlCol="0" anchor="ctr"/>
+          <a:lstStyle/>
+          <a:p>
+            <a:pPr algn="ctr"/>
+          </a:p>
+        </p:txBody>
+      </p:sp>
+      <p:sp>
+        <p:nvSpPr>
+          <p:cNvPr id="13" name="TextBox 12"/>
+          <p:cNvSpPr txBox="1"/>
+          <p:nvPr/>
+        </p:nvSpPr>
+        <p:spPr>
+          <a:xfrm>
+            <a:off x="3527298" y="1691640"/>
+            <a:ext cx="2311146" cy="411480"/>
+          </a:xfrm>
+          <a:prstGeom prst="rect">
+            <a:avLst/>
+          </a:prstGeom>
+          <a:noFill/>
+        </p:spPr>
+        <p:txBody>
+          <a:bodyPr wrap="square" lIns="0" rIns="0" tIns="0" bIns="0" anchor="t">
+            <a:spAutoFit/>
+          </a:bodyPr>
+          <a:lstStyle/>
+          <a:p>
+            <a:pPr algn="l"/>
+            <a:r>
+              <a:rPr sz="1100" b="1" i="0">
+                <a:solidFill>
+                  <a:srgbClr val="0F1F3D"/>
+                </a:solidFill>
+                <a:latin typeface="Calibri"/>
+              </a:rPr>
+              <a:t>ICPE Enregistrement</a:t>
+            </a:r>
+          </a:p>
+        </p:txBody>
+      </p:sp>
+      <p:sp>
+        <p:nvSpPr>
+          <p:cNvPr id="14" name="TextBox 13"/>
+          <p:cNvSpPr txBox="1"/>
+          <p:nvPr/>
+        </p:nvSpPr>
+        <p:spPr>
+          <a:xfrm>
+            <a:off x="3527298" y="2148840"/>
+            <a:ext cx="2311146" cy="576072"/>
+          </a:xfrm>
+          <a:prstGeom prst="rect">
+            <a:avLst/>
+          </a:prstGeom>
+          <a:noFill/>
+        </p:spPr>
+        <p:txBody>
+          <a:bodyPr wrap="square" lIns="0" rIns="0" tIns="0" bIns="0" anchor="t">
+            <a:spAutoFit/>
+          </a:bodyPr>
+          <a:lstStyle/>
+          <a:p>
+            <a:pPr algn="l"/>
+            <a:r>
+              <a:rPr sz="900" b="0" i="0">
+                <a:solidFill>
+                  <a:srgbClr val="1E293B"/>
+                </a:solidFill>
+                <a:latin typeface="Calibri"/>
+              </a:rPr>
+              <a:t>Dossier · CODERST · arrêté · affichage parcelle</a:t>
+            </a:r>
+          </a:p>
+        </p:txBody>
+      </p:sp>
+      <p:sp>
+        <p:nvSpPr>
+          <p:cNvPr id="15" name="Rounded Rectangle 14"/>
+          <p:cNvSpPr/>
+          <p:nvPr/>
+        </p:nvSpPr>
+        <p:spPr>
+          <a:xfrm>
+            <a:off x="6185916" y="1417320"/>
+            <a:ext cx="2676906" cy="1399032"/>
+          </a:xfrm>
+          <a:prstGeom prst="roundRect">
+            <a:avLst>
+              <a:gd name="adj" fmla="val 6000"/>
+            </a:avLst>
+          </a:prstGeom>
+          <a:solidFill>
+            <a:srgbClr val="F1F5F9"/>
+          </a:solidFill>
+          <a:ln w="6350">
+            <a:solidFill>
+              <a:srgbClr val="CBD5E1"/>
+            </a:solidFill>
+          </a:ln>
+          <a:effectLst/>
+        </p:spPr>
+        <p:style>
+          <a:lnRef idx="1">
+            <a:schemeClr val="accent1"/>
+          </a:lnRef>
+          <a:fillRef idx="3">
+            <a:schemeClr val="accent1"/>
+          </a:fillRef>
+          <a:effectRef idx="2">
+            <a:schemeClr val="accent1"/>
+          </a:effectRef>
+          <a:fontRef idx="minor">
+            <a:schemeClr val="lt1"/>
+          </a:fontRef>
+        </p:style>
+        <p:txBody>
+          <a:bodyPr rtlCol="0" anchor="ctr"/>
+          <a:lstStyle/>
+          <a:p>
+            <a:pPr algn="ctr"/>
+          </a:p>
+        </p:txBody>
+      </p:sp>
+      <p:sp>
+        <p:nvSpPr>
+          <p:cNvPr id="16" name="Rectangle 15"/>
+          <p:cNvSpPr/>
+          <p:nvPr/>
+        </p:nvSpPr>
+        <p:spPr>
+          <a:xfrm>
+            <a:off x="6185916" y="1417320"/>
+            <a:ext cx="2676906" cy="109728"/>
+          </a:xfrm>
+          <a:prstGeom prst="rect">
+            <a:avLst/>
+          </a:prstGeom>
+          <a:solidFill>
+            <a:srgbClr val="6D28D9"/>
+          </a:solidFill>
+          <a:ln>
+            <a:noFill/>
+          </a:ln>
+          <a:effectLst/>
+        </p:spPr>
+        <p:style>
+          <a:lnRef idx="1">
+            <a:schemeClr val="accent1"/>
+          </a:lnRef>
+          <a:fillRef idx="3">
+            <a:schemeClr val="accent1"/>
+          </a:fillRef>
+          <a:effectRef idx="2">
+            <a:schemeClr val="accent1"/>
+          </a:effectRef>
+          <a:fontRef idx="minor">
+            <a:schemeClr val="lt1"/>
+          </a:fontRef>
+        </p:style>
+        <p:txBody>
+          <a:bodyPr rtlCol="0" anchor="ctr"/>
+          <a:lstStyle/>
+          <a:p>
+            <a:pPr algn="ctr"/>
+          </a:p>
+        </p:txBody>
+      </p:sp>
+      <p:sp>
+        <p:nvSpPr>
+          <p:cNvPr id="17" name="TextBox 16"/>
+          <p:cNvSpPr txBox="1"/>
+          <p:nvPr/>
+        </p:nvSpPr>
+        <p:spPr>
+          <a:xfrm>
+            <a:off x="6368796" y="1691640"/>
+            <a:ext cx="2311146" cy="411480"/>
+          </a:xfrm>
+          <a:prstGeom prst="rect">
+            <a:avLst/>
+          </a:prstGeom>
+          <a:noFill/>
+        </p:spPr>
+        <p:txBody>
+          <a:bodyPr wrap="square" lIns="0" rIns="0" tIns="0" bIns="0" anchor="t">
+            <a:spAutoFit/>
+          </a:bodyPr>
+          <a:lstStyle/>
+          <a:p>
+            <a:pPr algn="l"/>
+            <a:r>
+              <a:rPr sz="1100" b="1" i="0">
+                <a:solidFill>
+                  <a:srgbClr val="0F1F3D"/>
+                </a:solidFill>
+                <a:latin typeface="Calibri"/>
+              </a:rPr>
+              <a:t>ICPE Autorisation</a:t>
+            </a:r>
+          </a:p>
+        </p:txBody>
+      </p:sp>
+      <p:sp>
+        <p:nvSpPr>
+          <p:cNvPr id="18" name="TextBox 17"/>
+          <p:cNvSpPr txBox="1"/>
+          <p:nvPr/>
+        </p:nvSpPr>
+        <p:spPr>
+          <a:xfrm>
+            <a:off x="6368796" y="2148840"/>
+            <a:ext cx="2311146" cy="576072"/>
+          </a:xfrm>
+          <a:prstGeom prst="rect">
+            <a:avLst/>
+          </a:prstGeom>
+          <a:noFill/>
+        </p:spPr>
+        <p:txBody>
+          <a:bodyPr wrap="square" lIns="0" rIns="0" tIns="0" bIns="0" anchor="t">
+            <a:spAutoFit/>
+          </a:bodyPr>
+          <a:lstStyle/>
+          <a:p>
+            <a:pPr algn="l"/>
+            <a:r>
+              <a:rPr sz="900" b="0" i="0">
+                <a:solidFill>
+                  <a:srgbClr val="1E293B"/>
+                </a:solidFill>
+                <a:latin typeface="Calibri"/>
+              </a:rPr>
+              <a:t>Réalisation · validation · envoi</a:t>
+            </a:r>
+          </a:p>
+        </p:txBody>
+      </p:sp>
+      <p:sp>
+        <p:nvSpPr>
+          <p:cNvPr id="19" name="Rounded Rectangle 18"/>
+          <p:cNvSpPr/>
+          <p:nvPr/>
+        </p:nvSpPr>
+        <p:spPr>
+          <a:xfrm>
+            <a:off x="9027414" y="1417320"/>
+            <a:ext cx="2676906" cy="1399032"/>
+          </a:xfrm>
+          <a:prstGeom prst="roundRect">
+            <a:avLst>
+              <a:gd name="adj" fmla="val 6000"/>
+            </a:avLst>
+          </a:prstGeom>
+          <a:solidFill>
+            <a:srgbClr val="F1F5F9"/>
+          </a:solidFill>
+          <a:ln w="6350">
+            <a:solidFill>
+              <a:srgbClr val="CBD5E1"/>
+            </a:solidFill>
+          </a:ln>
+          <a:effectLst/>
+        </p:spPr>
+        <p:style>
+          <a:lnRef idx="1">
+            <a:schemeClr val="accent1"/>
+          </a:lnRef>
+          <a:fillRef idx="3">
+            <a:schemeClr val="accent1"/>
+          </a:fillRef>
+          <a:effectRef idx="2">
+            <a:schemeClr val="accent1"/>
+          </a:effectRef>
+          <a:fontRef idx="minor">
+            <a:schemeClr val="lt1"/>
+          </a:fontRef>
+        </p:style>
+        <p:txBody>
+          <a:bodyPr rtlCol="0" anchor="ctr"/>
+          <a:lstStyle/>
+          <a:p>
+            <a:pPr algn="ctr"/>
+          </a:p>
+        </p:txBody>
+      </p:sp>
+      <p:sp>
+        <p:nvSpPr>
+          <p:cNvPr id="20" name="Rectangle 19"/>
+          <p:cNvSpPr/>
+          <p:nvPr/>
+        </p:nvSpPr>
+        <p:spPr>
+          <a:xfrm>
+            <a:off x="9027414" y="1417320"/>
+            <a:ext cx="2676906" cy="109728"/>
+          </a:xfrm>
+          <a:prstGeom prst="rect">
+            <a:avLst/>
+          </a:prstGeom>
+          <a:solidFill>
+            <a:srgbClr val="6D28D9"/>
+          </a:solidFill>
+          <a:ln>
+            <a:noFill/>
+          </a:ln>
+          <a:effectLst/>
+        </p:spPr>
+        <p:style>
+          <a:lnRef idx="1">
+            <a:schemeClr val="accent1"/>
+          </a:lnRef>
+          <a:fillRef idx="3">
+            <a:schemeClr val="accent1"/>
+          </a:fillRef>
+          <a:effectRef idx="2">
+            <a:schemeClr val="accent1"/>
+          </a:effectRef>
+          <a:fontRef idx="minor">
+            <a:schemeClr val="lt1"/>
+          </a:fontRef>
+        </p:style>
+        <p:txBody>
+          <a:bodyPr rtlCol="0" anchor="ctr"/>
+          <a:lstStyle/>
+          <a:p>
+            <a:pPr algn="ctr"/>
+          </a:p>
+        </p:txBody>
+      </p:sp>
+      <p:sp>
+        <p:nvSpPr>
+          <p:cNvPr id="21" name="TextBox 20"/>
+          <p:cNvSpPr txBox="1"/>
+          <p:nvPr/>
+        </p:nvSpPr>
+        <p:spPr>
+          <a:xfrm>
+            <a:off x="9210294" y="1691640"/>
+            <a:ext cx="2311146" cy="411480"/>
+          </a:xfrm>
+          <a:prstGeom prst="rect">
+            <a:avLst/>
+          </a:prstGeom>
+          <a:noFill/>
+        </p:spPr>
+        <p:txBody>
+          <a:bodyPr wrap="square" lIns="0" rIns="0" tIns="0" bIns="0" anchor="t">
+            <a:spAutoFit/>
+          </a:bodyPr>
+          <a:lstStyle/>
+          <a:p>
+            <a:pPr algn="l"/>
+            <a:r>
+              <a:rPr sz="1100" b="1" i="0">
+                <a:solidFill>
+                  <a:srgbClr val="0F1F3D"/>
+                </a:solidFill>
+                <a:latin typeface="Calibri"/>
+              </a:rPr>
+              <a:t>Permis de construire</a:t>
+            </a:r>
+          </a:p>
+        </p:txBody>
+      </p:sp>
+      <p:sp>
+        <p:nvSpPr>
+          <p:cNvPr id="22" name="TextBox 21"/>
+          <p:cNvSpPr txBox="1"/>
+          <p:nvPr/>
+        </p:nvSpPr>
+        <p:spPr>
+          <a:xfrm>
+            <a:off x="9210294" y="2148840"/>
+            <a:ext cx="2311146" cy="576072"/>
+          </a:xfrm>
+          <a:prstGeom prst="rect">
+            <a:avLst/>
+          </a:prstGeom>
+          <a:noFill/>
+        </p:spPr>
+        <p:txBody>
+          <a:bodyPr wrap="square" lIns="0" rIns="0" tIns="0" bIns="0" anchor="t">
+            <a:spAutoFit/>
+          </a:bodyPr>
+          <a:lstStyle/>
+          <a:p>
+            <a:pPr algn="l"/>
+            <a:r>
+              <a:rPr sz="900" b="0" i="0">
+                <a:solidFill>
+                  <a:srgbClr val="1E293B"/>
+                </a:solidFill>
+                <a:latin typeface="Calibri"/>
+              </a:rPr>
+              <a:t>Plans PC · dossier · dépôt · arrêté · affichage · purge</a:t>
+            </a:r>
+          </a:p>
+        </p:txBody>
+      </p:sp>
+      <p:sp>
+        <p:nvSpPr>
+          <p:cNvPr id="23" name="Rounded Rectangle 22"/>
+          <p:cNvSpPr/>
+          <p:nvPr/>
+        </p:nvSpPr>
+        <p:spPr>
+          <a:xfrm>
+            <a:off x="502920" y="2980944"/>
+            <a:ext cx="2676906" cy="1399032"/>
+          </a:xfrm>
+          <a:prstGeom prst="roundRect">
+            <a:avLst>
+              <a:gd name="adj" fmla="val 6000"/>
+            </a:avLst>
+          </a:prstGeom>
+          <a:solidFill>
+            <a:srgbClr val="F1F5F9"/>
+          </a:solidFill>
+          <a:ln w="6350">
+            <a:solidFill>
+              <a:srgbClr val="CBD5E1"/>
+            </a:solidFill>
+          </a:ln>
+          <a:effectLst/>
+        </p:spPr>
+        <p:style>
+          <a:lnRef idx="1">
+            <a:schemeClr val="accent1"/>
+          </a:lnRef>
+          <a:fillRef idx="3">
+            <a:schemeClr val="accent1"/>
+          </a:fillRef>
+          <a:effectRef idx="2">
+            <a:schemeClr val="accent1"/>
+          </a:effectRef>
+          <a:fontRef idx="minor">
+            <a:schemeClr val="lt1"/>
+          </a:fontRef>
+        </p:style>
+        <p:txBody>
+          <a:bodyPr rtlCol="0" anchor="ctr"/>
+          <a:lstStyle/>
+          <a:p>
+            <a:pPr algn="ctr"/>
+          </a:p>
+        </p:txBody>
+      </p:sp>
+      <p:sp>
+        <p:nvSpPr>
+          <p:cNvPr id="24" name="Rectangle 23"/>
+          <p:cNvSpPr/>
+          <p:nvPr/>
+        </p:nvSpPr>
+        <p:spPr>
+          <a:xfrm>
+            <a:off x="502920" y="2980944"/>
+            <a:ext cx="2676906" cy="109728"/>
+          </a:xfrm>
+          <a:prstGeom prst="rect">
+            <a:avLst/>
+          </a:prstGeom>
+          <a:solidFill>
+            <a:srgbClr val="6D28D9"/>
+          </a:solidFill>
+          <a:ln>
+            <a:noFill/>
+          </a:ln>
+          <a:effectLst/>
+        </p:spPr>
+        <p:style>
+          <a:lnRef idx="1">
+            <a:schemeClr val="accent1"/>
+          </a:lnRef>
+          <a:fillRef idx="3">
+            <a:schemeClr val="accent1"/>
+          </a:fillRef>
+          <a:effectRef idx="2">
+            <a:schemeClr val="accent1"/>
+          </a:effectRef>
+          <a:fontRef idx="minor">
+            <a:schemeClr val="lt1"/>
+          </a:fontRef>
+        </p:style>
+        <p:txBody>
+          <a:bodyPr rtlCol="0" anchor="ctr"/>
+          <a:lstStyle/>
+          <a:p>
+            <a:pPr algn="ctr"/>
+          </a:p>
+        </p:txBody>
+      </p:sp>
+      <p:sp>
+        <p:nvSpPr>
+          <p:cNvPr id="25" name="TextBox 24"/>
+          <p:cNvSpPr txBox="1"/>
+          <p:nvPr/>
+        </p:nvSpPr>
+        <p:spPr>
+          <a:xfrm>
+            <a:off x="685800" y="3255264"/>
+            <a:ext cx="2311146" cy="411480"/>
+          </a:xfrm>
+          <a:prstGeom prst="rect">
+            <a:avLst/>
+          </a:prstGeom>
+          <a:noFill/>
+        </p:spPr>
+        <p:txBody>
+          <a:bodyPr wrap="square" lIns="0" rIns="0" tIns="0" bIns="0" anchor="t">
+            <a:spAutoFit/>
+          </a:bodyPr>
+          <a:lstStyle/>
+          <a:p>
+            <a:pPr algn="l"/>
+            <a:r>
+              <a:rPr sz="1100" b="1" i="0">
+                <a:solidFill>
+                  <a:srgbClr val="0F1F3D"/>
+                </a:solidFill>
+                <a:latin typeface="Calibri"/>
+              </a:rPr>
+              <a:t>Agrément sanitaire</a:t>
+            </a:r>
+          </a:p>
+        </p:txBody>
+      </p:sp>
+      <p:sp>
+        <p:nvSpPr>
+          <p:cNvPr id="26" name="TextBox 25"/>
+          <p:cNvSpPr txBox="1"/>
+          <p:nvPr/>
+        </p:nvSpPr>
+        <p:spPr>
+          <a:xfrm>
+            <a:off x="685800" y="3712464"/>
+            <a:ext cx="2311146" cy="576072"/>
+          </a:xfrm>
+          <a:prstGeom prst="rect">
+            <a:avLst/>
+          </a:prstGeom>
+          <a:noFill/>
+        </p:spPr>
+        <p:txBody>
+          <a:bodyPr wrap="square" lIns="0" rIns="0" tIns="0" bIns="0" anchor="t">
+            <a:spAutoFit/>
+          </a:bodyPr>
+          <a:lstStyle/>
+          <a:p>
+            <a:pPr algn="l"/>
+            <a:r>
+              <a:rPr sz="900" b="0" i="0">
+                <a:solidFill>
+                  <a:srgbClr val="1E293B"/>
+                </a:solidFill>
+                <a:latin typeface="Calibri"/>
+              </a:rPr>
+              <a:t>Dossier · 2 visites · agrément provisoire puis définitif</a:t>
+            </a:r>
+          </a:p>
+        </p:txBody>
+      </p:sp>
+      <p:sp>
+        <p:nvSpPr>
+          <p:cNvPr id="27" name="Rounded Rectangle 26"/>
+          <p:cNvSpPr/>
+          <p:nvPr/>
+        </p:nvSpPr>
+        <p:spPr>
+          <a:xfrm>
+            <a:off x="3344418" y="2980944"/>
+            <a:ext cx="2676906" cy="1399032"/>
+          </a:xfrm>
+          <a:prstGeom prst="roundRect">
+            <a:avLst>
+              <a:gd name="adj" fmla="val 6000"/>
+            </a:avLst>
+          </a:prstGeom>
+          <a:solidFill>
+            <a:srgbClr val="F1F5F9"/>
+          </a:solidFill>
+          <a:ln w="6350">
+            <a:solidFill>
+              <a:srgbClr val="CBD5E1"/>
+            </a:solidFill>
+          </a:ln>
+          <a:effectLst/>
+        </p:spPr>
+        <p:style>
+          <a:lnRef idx="1">
+            <a:schemeClr val="accent1"/>
+          </a:lnRef>
+          <a:fillRef idx="3">
+            <a:schemeClr val="accent1"/>
+          </a:fillRef>
+          <a:effectRef idx="2">
+            <a:schemeClr val="accent1"/>
+          </a:effectRef>
+          <a:fontRef idx="minor">
+            <a:schemeClr val="lt1"/>
+          </a:fontRef>
+        </p:style>
+        <p:txBody>
+          <a:bodyPr rtlCol="0" anchor="ctr"/>
+          <a:lstStyle/>
+          <a:p>
+            <a:pPr algn="ctr"/>
+          </a:p>
+        </p:txBody>
+      </p:sp>
+      <p:sp>
+        <p:nvSpPr>
+          <p:cNvPr id="28" name="Rectangle 27"/>
+          <p:cNvSpPr/>
+          <p:nvPr/>
+        </p:nvSpPr>
+        <p:spPr>
+          <a:xfrm>
+            <a:off x="3344418" y="2980944"/>
+            <a:ext cx="2676906" cy="109728"/>
+          </a:xfrm>
+          <a:prstGeom prst="rect">
+            <a:avLst/>
+          </a:prstGeom>
+          <a:solidFill>
+            <a:srgbClr val="6D28D9"/>
+          </a:solidFill>
+          <a:ln>
+            <a:noFill/>
+          </a:ln>
+          <a:effectLst/>
+        </p:spPr>
+        <p:style>
+          <a:lnRef idx="1">
+            <a:schemeClr val="accent1"/>
+          </a:lnRef>
+          <a:fillRef idx="3">
+            <a:schemeClr val="accent1"/>
+          </a:fillRef>
+          <a:effectRef idx="2">
+            <a:schemeClr val="accent1"/>
+          </a:effectRef>
+          <a:fontRef idx="minor">
+            <a:schemeClr val="lt1"/>
+          </a:fontRef>
+        </p:style>
+        <p:txBody>
+          <a:bodyPr rtlCol="0" anchor="ctr"/>
+          <a:lstStyle/>
+          <a:p>
+            <a:pPr algn="ctr"/>
+          </a:p>
+        </p:txBody>
+      </p:sp>
+      <p:sp>
+        <p:nvSpPr>
+          <p:cNvPr id="29" name="TextBox 28"/>
+          <p:cNvSpPr txBox="1"/>
+          <p:nvPr/>
+        </p:nvSpPr>
+        <p:spPr>
+          <a:xfrm>
+            <a:off x="3527298" y="3255264"/>
+            <a:ext cx="2311146" cy="411480"/>
+          </a:xfrm>
+          <a:prstGeom prst="rect">
+            <a:avLst/>
+          </a:prstGeom>
+          <a:noFill/>
+        </p:spPr>
+        <p:txBody>
+          <a:bodyPr wrap="square" lIns="0" rIns="0" tIns="0" bIns="0" anchor="t">
+            <a:spAutoFit/>
+          </a:bodyPr>
+          <a:lstStyle/>
+          <a:p>
+            <a:pPr algn="l"/>
+            <a:r>
+              <a:rPr sz="1100" b="1" i="0">
+                <a:solidFill>
+                  <a:srgbClr val="0F1F3D"/>
+                </a:solidFill>
+                <a:latin typeface="Calibri"/>
+              </a:rPr>
+              <a:t>Plan d'Assurance Construction</a:t>
+            </a:r>
+          </a:p>
+        </p:txBody>
+      </p:sp>
+      <p:sp>
+        <p:nvSpPr>
+          <p:cNvPr id="30" name="TextBox 29"/>
+          <p:cNvSpPr txBox="1"/>
+          <p:nvPr/>
+        </p:nvSpPr>
+        <p:spPr>
+          <a:xfrm>
+            <a:off x="3527298" y="3712464"/>
+            <a:ext cx="2311146" cy="576072"/>
+          </a:xfrm>
+          <a:prstGeom prst="rect">
+            <a:avLst/>
+          </a:prstGeom>
+          <a:noFill/>
+        </p:spPr>
+        <p:txBody>
+          <a:bodyPr wrap="square" lIns="0" rIns="0" tIns="0" bIns="0" anchor="t">
+            <a:spAutoFit/>
+          </a:bodyPr>
+          <a:lstStyle/>
+          <a:p>
+            <a:pPr algn="l"/>
+            <a:r>
+              <a:rPr sz="900" b="0" i="0">
+                <a:solidFill>
+                  <a:srgbClr val="1E293B"/>
+                </a:solidFill>
+                <a:latin typeface="Calibri"/>
+              </a:rPr>
+              <a:t>Réalisation · validation · envoi</a:t>
+            </a:r>
+          </a:p>
+        </p:txBody>
+      </p:sp>
+      <p:sp>
+        <p:nvSpPr>
+          <p:cNvPr id="31" name="Rounded Rectangle 30"/>
+          <p:cNvSpPr/>
+          <p:nvPr/>
+        </p:nvSpPr>
+        <p:spPr>
+          <a:xfrm>
+            <a:off x="6185916" y="2980944"/>
+            <a:ext cx="2676906" cy="1399032"/>
+          </a:xfrm>
+          <a:prstGeom prst="roundRect">
+            <a:avLst>
+              <a:gd name="adj" fmla="val 6000"/>
+            </a:avLst>
+          </a:prstGeom>
+          <a:solidFill>
+            <a:srgbClr val="F1F5F9"/>
+          </a:solidFill>
+          <a:ln w="6350">
+            <a:solidFill>
+              <a:srgbClr val="CBD5E1"/>
+            </a:solidFill>
+          </a:ln>
+          <a:effectLst/>
+        </p:spPr>
+        <p:style>
+          <a:lnRef idx="1">
+            <a:schemeClr val="accent1"/>
+          </a:lnRef>
+          <a:fillRef idx="3">
+            <a:schemeClr val="accent1"/>
+          </a:fillRef>
+          <a:effectRef idx="2">
+            <a:schemeClr val="accent1"/>
+          </a:effectRef>
+          <a:fontRef idx="minor">
+            <a:schemeClr val="lt1"/>
+          </a:fontRef>
+        </p:style>
+        <p:txBody>
+          <a:bodyPr rtlCol="0" anchor="ctr"/>
+          <a:lstStyle/>
+          <a:p>
+            <a:pPr algn="ctr"/>
+          </a:p>
+        </p:txBody>
+      </p:sp>
+      <p:sp>
+        <p:nvSpPr>
+          <p:cNvPr id="32" name="Rectangle 31"/>
+          <p:cNvSpPr/>
+          <p:nvPr/>
+        </p:nvSpPr>
+        <p:spPr>
+          <a:xfrm>
+            <a:off x="6185916" y="2980944"/>
+            <a:ext cx="2676906" cy="109728"/>
+          </a:xfrm>
+          <a:prstGeom prst="rect">
+            <a:avLst/>
+          </a:prstGeom>
+          <a:solidFill>
+            <a:srgbClr val="6D28D9"/>
+          </a:solidFill>
+          <a:ln>
+            <a:noFill/>
+          </a:ln>
+          <a:effectLst/>
+        </p:spPr>
+        <p:style>
+          <a:lnRef idx="1">
+            <a:schemeClr val="accent1"/>
+          </a:lnRef>
+          <a:fillRef idx="3">
+            <a:schemeClr val="accent1"/>
+          </a:fillRef>
+          <a:effectRef idx="2">
+            <a:schemeClr val="accent1"/>
+          </a:effectRef>
+          <a:fontRef idx="minor">
+            <a:schemeClr val="lt1"/>
+          </a:fontRef>
+        </p:style>
+        <p:txBody>
+          <a:bodyPr rtlCol="0" anchor="ctr"/>
+          <a:lstStyle/>
+          <a:p>
+            <a:pPr algn="ctr"/>
+          </a:p>
+        </p:txBody>
+      </p:sp>
+      <p:sp>
+        <p:nvSpPr>
+          <p:cNvPr id="33" name="TextBox 32"/>
+          <p:cNvSpPr txBox="1"/>
+          <p:nvPr/>
+        </p:nvSpPr>
+        <p:spPr>
+          <a:xfrm>
+            <a:off x="6368796" y="3255264"/>
+            <a:ext cx="2311146" cy="411480"/>
+          </a:xfrm>
+          <a:prstGeom prst="rect">
+            <a:avLst/>
+          </a:prstGeom>
+          <a:noFill/>
+        </p:spPr>
+        <p:txBody>
+          <a:bodyPr wrap="square" lIns="0" rIns="0" tIns="0" bIns="0" anchor="t">
+            <a:spAutoFit/>
+          </a:bodyPr>
+          <a:lstStyle/>
+          <a:p>
+            <a:pPr algn="l"/>
+            <a:r>
+              <a:rPr sz="1100" b="1" i="0">
+                <a:solidFill>
+                  <a:srgbClr val="0F1F3D"/>
+                </a:solidFill>
+                <a:latin typeface="Calibri"/>
+              </a:rPr>
+              <a:t>Plan règlementaire</a:t>
+            </a:r>
+          </a:p>
+        </p:txBody>
+      </p:sp>
+      <p:sp>
+        <p:nvSpPr>
+          <p:cNvPr id="34" name="TextBox 33"/>
+          <p:cNvSpPr txBox="1"/>
+          <p:nvPr/>
+        </p:nvSpPr>
+        <p:spPr>
+          <a:xfrm>
+            <a:off x="6368796" y="3712464"/>
+            <a:ext cx="2311146" cy="576072"/>
+          </a:xfrm>
+          <a:prstGeom prst="rect">
+            <a:avLst/>
+          </a:prstGeom>
+          <a:noFill/>
+        </p:spPr>
+        <p:txBody>
+          <a:bodyPr wrap="square" lIns="0" rIns="0" tIns="0" bIns="0" anchor="t">
+            <a:spAutoFit/>
+          </a:bodyPr>
+          <a:lstStyle/>
+          <a:p>
+            <a:pPr algn="l"/>
+            <a:r>
+              <a:rPr sz="900" b="0" i="0">
+                <a:solidFill>
+                  <a:srgbClr val="1E293B"/>
+                </a:solidFill>
+                <a:latin typeface="Calibri"/>
+              </a:rPr>
+              <a:t>Réalisation · validation · envoi</a:t>
+            </a:r>
+          </a:p>
+        </p:txBody>
+      </p:sp>
+      <p:sp>
+        <p:nvSpPr>
+          <p:cNvPr id="35" name="Rounded Rectangle 34"/>
+          <p:cNvSpPr/>
+          <p:nvPr/>
+        </p:nvSpPr>
+        <p:spPr>
+          <a:xfrm>
+            <a:off x="9027414" y="2980944"/>
+            <a:ext cx="2676906" cy="1399032"/>
+          </a:xfrm>
+          <a:prstGeom prst="roundRect">
+            <a:avLst>
+              <a:gd name="adj" fmla="val 6000"/>
+            </a:avLst>
+          </a:prstGeom>
+          <a:solidFill>
+            <a:srgbClr val="F1F5F9"/>
+          </a:solidFill>
+          <a:ln w="6350">
+            <a:solidFill>
+              <a:srgbClr val="CBD5E1"/>
+            </a:solidFill>
+          </a:ln>
+          <a:effectLst/>
+        </p:spPr>
+        <p:style>
+          <a:lnRef idx="1">
+            <a:schemeClr val="accent1"/>
+          </a:lnRef>
+          <a:fillRef idx="3">
+            <a:schemeClr val="accent1"/>
+          </a:fillRef>
+          <a:effectRef idx="2">
+            <a:schemeClr val="accent1"/>
+          </a:effectRef>
+          <a:fontRef idx="minor">
+            <a:schemeClr val="lt1"/>
+          </a:fontRef>
+        </p:style>
+        <p:txBody>
+          <a:bodyPr rtlCol="0" anchor="ctr"/>
+          <a:lstStyle/>
+          <a:p>
+            <a:pPr algn="ctr"/>
+          </a:p>
+        </p:txBody>
+      </p:sp>
+      <p:sp>
+        <p:nvSpPr>
+          <p:cNvPr id="36" name="Rectangle 35"/>
+          <p:cNvSpPr/>
+          <p:nvPr/>
+        </p:nvSpPr>
+        <p:spPr>
+          <a:xfrm>
+            <a:off x="9027414" y="2980944"/>
+            <a:ext cx="2676906" cy="109728"/>
+          </a:xfrm>
+          <a:prstGeom prst="rect">
+            <a:avLst/>
+          </a:prstGeom>
+          <a:solidFill>
+            <a:srgbClr val="6D28D9"/>
+          </a:solidFill>
+          <a:ln>
+            <a:noFill/>
+          </a:ln>
+          <a:effectLst/>
+        </p:spPr>
+        <p:style>
+          <a:lnRef idx="1">
+            <a:schemeClr val="accent1"/>
+          </a:lnRef>
+          <a:fillRef idx="3">
+            <a:schemeClr val="accent1"/>
+          </a:fillRef>
+          <a:effectRef idx="2">
+            <a:schemeClr val="accent1"/>
+          </a:effectRef>
+          <a:fontRef idx="minor">
+            <a:schemeClr val="lt1"/>
+          </a:fontRef>
+        </p:style>
+        <p:txBody>
+          <a:bodyPr rtlCol="0" anchor="ctr"/>
+          <a:lstStyle/>
+          <a:p>
+            <a:pPr algn="ctr"/>
+          </a:p>
+        </p:txBody>
+      </p:sp>
+      <p:sp>
+        <p:nvSpPr>
+          <p:cNvPr id="37" name="TextBox 36"/>
+          <p:cNvSpPr txBox="1"/>
+          <p:nvPr/>
+        </p:nvSpPr>
+        <p:spPr>
+          <a:xfrm>
+            <a:off x="9210294" y="3255264"/>
+            <a:ext cx="2311146" cy="411480"/>
+          </a:xfrm>
+          <a:prstGeom prst="rect">
+            <a:avLst/>
+          </a:prstGeom>
+          <a:noFill/>
+        </p:spPr>
+        <p:txBody>
+          <a:bodyPr wrap="square" lIns="0" rIns="0" tIns="0" bIns="0" anchor="t">
+            <a:spAutoFit/>
+          </a:bodyPr>
+          <a:lstStyle/>
+          <a:p>
+            <a:pPr algn="l"/>
+            <a:r>
+              <a:rPr sz="1100" b="1" i="0">
+                <a:solidFill>
+                  <a:srgbClr val="0F1F3D"/>
+                </a:solidFill>
+                <a:latin typeface="Calibri"/>
+              </a:rPr>
+              <a:t>Dossier de subvention</a:t>
+            </a:r>
+          </a:p>
+        </p:txBody>
+      </p:sp>
+      <p:sp>
+        <p:nvSpPr>
+          <p:cNvPr id="38" name="TextBox 37"/>
+          <p:cNvSpPr txBox="1"/>
+          <p:nvPr/>
+        </p:nvSpPr>
+        <p:spPr>
+          <a:xfrm>
+            <a:off x="9210294" y="3712464"/>
+            <a:ext cx="2311146" cy="576072"/>
+          </a:xfrm>
+          <a:prstGeom prst="rect">
+            <a:avLst/>
+          </a:prstGeom>
+          <a:noFill/>
+        </p:spPr>
+        <p:txBody>
+          <a:bodyPr wrap="square" lIns="0" rIns="0" tIns="0" bIns="0" anchor="t">
+            <a:spAutoFit/>
+          </a:bodyPr>
+          <a:lstStyle/>
+          <a:p>
+            <a:pPr algn="l"/>
+            <a:r>
+              <a:rPr sz="900" b="0" i="0">
+                <a:solidFill>
+                  <a:srgbClr val="1E293B"/>
+                </a:solidFill>
+                <a:latin typeface="Calibri"/>
+              </a:rPr>
+              <a:t>Constitution · dépôt · suivi instruction</a:t>
+            </a:r>
+          </a:p>
+        </p:txBody>
+      </p:sp>
+      <p:sp>
+        <p:nvSpPr>
+          <p:cNvPr id="39" name="Rounded Rectangle 38"/>
+          <p:cNvSpPr/>
+          <p:nvPr/>
+        </p:nvSpPr>
+        <p:spPr>
+          <a:xfrm>
+            <a:off x="502920" y="4544568"/>
+            <a:ext cx="2676906" cy="1399032"/>
+          </a:xfrm>
+          <a:prstGeom prst="roundRect">
+            <a:avLst>
+              <a:gd name="adj" fmla="val 6000"/>
+            </a:avLst>
+          </a:prstGeom>
+          <a:solidFill>
+            <a:srgbClr val="F1F5F9"/>
+          </a:solidFill>
+          <a:ln w="6350">
+            <a:solidFill>
+              <a:srgbClr val="CBD5E1"/>
+            </a:solidFill>
+          </a:ln>
+          <a:effectLst/>
+        </p:spPr>
+        <p:style>
+          <a:lnRef idx="1">
+            <a:schemeClr val="accent1"/>
+          </a:lnRef>
+          <a:fillRef idx="3">
+            <a:schemeClr val="accent1"/>
+          </a:fillRef>
+          <a:effectRef idx="2">
+            <a:schemeClr val="accent1"/>
+          </a:effectRef>
+          <a:fontRef idx="minor">
+            <a:schemeClr val="lt1"/>
+          </a:fontRef>
+        </p:style>
+        <p:txBody>
+          <a:bodyPr rtlCol="0" anchor="ctr"/>
+          <a:lstStyle/>
+          <a:p>
+            <a:pPr algn="ctr"/>
+          </a:p>
+        </p:txBody>
+      </p:sp>
+      <p:sp>
+        <p:nvSpPr>
+          <p:cNvPr id="40" name="Rectangle 39"/>
+          <p:cNvSpPr/>
+          <p:nvPr/>
+        </p:nvSpPr>
+        <p:spPr>
+          <a:xfrm>
+            <a:off x="502920" y="4544568"/>
+            <a:ext cx="2676906" cy="109728"/>
+          </a:xfrm>
+          <a:prstGeom prst="rect">
+            <a:avLst/>
+          </a:prstGeom>
+          <a:solidFill>
+            <a:srgbClr val="6D28D9"/>
+          </a:solidFill>
+          <a:ln>
+            <a:noFill/>
+          </a:ln>
+          <a:effectLst/>
+        </p:spPr>
+        <p:style>
+          <a:lnRef idx="1">
+            <a:schemeClr val="accent1"/>
+          </a:lnRef>
+          <a:fillRef idx="3">
+            <a:schemeClr val="accent1"/>
+          </a:fillRef>
+          <a:effectRef idx="2">
+            <a:schemeClr val="accent1"/>
+          </a:effectRef>
+          <a:fontRef idx="minor">
+            <a:schemeClr val="lt1"/>
+          </a:fontRef>
+        </p:style>
+        <p:txBody>
+          <a:bodyPr rtlCol="0" anchor="ctr"/>
+          <a:lstStyle/>
+          <a:p>
+            <a:pPr algn="ctr"/>
+          </a:p>
+        </p:txBody>
+      </p:sp>
+      <p:sp>
+        <p:nvSpPr>
+          <p:cNvPr id="41" name="TextBox 40"/>
+          <p:cNvSpPr txBox="1"/>
+          <p:nvPr/>
+        </p:nvSpPr>
+        <p:spPr>
+          <a:xfrm>
+            <a:off x="685800" y="4818888"/>
+            <a:ext cx="2311146" cy="411480"/>
+          </a:xfrm>
+          <a:prstGeom prst="rect">
+            <a:avLst/>
+          </a:prstGeom>
+          <a:noFill/>
+        </p:spPr>
+        <p:txBody>
+          <a:bodyPr wrap="square" lIns="0" rIns="0" tIns="0" bIns="0" anchor="t">
+            <a:spAutoFit/>
+          </a:bodyPr>
+          <a:lstStyle/>
+          <a:p>
+            <a:pPr algn="l"/>
+            <a:r>
+              <a:rPr sz="1100" b="1" i="0">
+                <a:solidFill>
+                  <a:srgbClr val="0F1F3D"/>
+                </a:solidFill>
+                <a:latin typeface="Calibri"/>
+              </a:rPr>
+              <a:t>Audit process</a:t>
+            </a:r>
+          </a:p>
+        </p:txBody>
+      </p:sp>
+      <p:sp>
+        <p:nvSpPr>
+          <p:cNvPr id="42" name="TextBox 41"/>
+          <p:cNvSpPr txBox="1"/>
+          <p:nvPr/>
+        </p:nvSpPr>
+        <p:spPr>
+          <a:xfrm>
+            <a:off x="685800" y="5276088"/>
+            <a:ext cx="2311146" cy="576072"/>
+          </a:xfrm>
+          <a:prstGeom prst="rect">
+            <a:avLst/>
+          </a:prstGeom>
+          <a:noFill/>
+        </p:spPr>
+        <p:txBody>
+          <a:bodyPr wrap="square" lIns="0" rIns="0" tIns="0" bIns="0" anchor="t">
+            <a:spAutoFit/>
+          </a:bodyPr>
+          <a:lstStyle/>
+          <a:p>
+            <a:pPr algn="l"/>
+            <a:r>
+              <a:rPr sz="900" b="0" i="0">
+                <a:solidFill>
+                  <a:srgbClr val="1E293B"/>
+                </a:solidFill>
+                <a:latin typeface="Calibri"/>
+              </a:rPr>
+              <a:t>Audit terrain process industriel</a:t>
+            </a:r>
+          </a:p>
+        </p:txBody>
+      </p:sp>
+      <p:sp>
+        <p:nvSpPr>
+          <p:cNvPr id="43" name="Rounded Rectangle 42"/>
+          <p:cNvSpPr/>
+          <p:nvPr/>
+        </p:nvSpPr>
+        <p:spPr>
+          <a:xfrm>
+            <a:off x="3344418" y="4544568"/>
+            <a:ext cx="2676906" cy="1399032"/>
+          </a:xfrm>
+          <a:prstGeom prst="roundRect">
+            <a:avLst>
+              <a:gd name="adj" fmla="val 6000"/>
+            </a:avLst>
+          </a:prstGeom>
+          <a:solidFill>
+            <a:srgbClr val="F1F5F9"/>
+          </a:solidFill>
+          <a:ln w="6350">
+            <a:solidFill>
+              <a:srgbClr val="CBD5E1"/>
+            </a:solidFill>
+          </a:ln>
+          <a:effectLst/>
+        </p:spPr>
+        <p:style>
+          <a:lnRef idx="1">
+            <a:schemeClr val="accent1"/>
+          </a:lnRef>
+          <a:fillRef idx="3">
+            <a:schemeClr val="accent1"/>
+          </a:fillRef>
+          <a:effectRef idx="2">
+            <a:schemeClr val="accent1"/>
+          </a:effectRef>
+          <a:fontRef idx="minor">
+            <a:schemeClr val="lt1"/>
+          </a:fontRef>
+        </p:style>
+        <p:txBody>
+          <a:bodyPr rtlCol="0" anchor="ctr"/>
+          <a:lstStyle/>
+          <a:p>
+            <a:pPr algn="ctr"/>
+          </a:p>
+        </p:txBody>
+      </p:sp>
+      <p:sp>
+        <p:nvSpPr>
+          <p:cNvPr id="44" name="Rectangle 43"/>
+          <p:cNvSpPr/>
+          <p:nvPr/>
+        </p:nvSpPr>
+        <p:spPr>
+          <a:xfrm>
+            <a:off x="3344418" y="4544568"/>
+            <a:ext cx="2676906" cy="109728"/>
+          </a:xfrm>
+          <a:prstGeom prst="rect">
+            <a:avLst/>
+          </a:prstGeom>
+          <a:solidFill>
+            <a:srgbClr val="6D28D9"/>
+          </a:solidFill>
+          <a:ln>
+            <a:noFill/>
+          </a:ln>
+          <a:effectLst/>
+        </p:spPr>
+        <p:style>
+          <a:lnRef idx="1">
+            <a:schemeClr val="accent1"/>
+          </a:lnRef>
+          <a:fillRef idx="3">
+            <a:schemeClr val="accent1"/>
+          </a:fillRef>
+          <a:effectRef idx="2">
+            <a:schemeClr val="accent1"/>
+          </a:effectRef>
+          <a:fontRef idx="minor">
+            <a:schemeClr val="lt1"/>
+          </a:fontRef>
+        </p:style>
+        <p:txBody>
+          <a:bodyPr rtlCol="0" anchor="ctr"/>
+          <a:lstStyle/>
+          <a:p>
+            <a:pPr algn="ctr"/>
+          </a:p>
+        </p:txBody>
+      </p:sp>
+      <p:sp>
+        <p:nvSpPr>
+          <p:cNvPr id="45" name="TextBox 44"/>
+          <p:cNvSpPr txBox="1"/>
+          <p:nvPr/>
+        </p:nvSpPr>
+        <p:spPr>
+          <a:xfrm>
+            <a:off x="3527298" y="4818888"/>
+            <a:ext cx="2311146" cy="411480"/>
+          </a:xfrm>
+          <a:prstGeom prst="rect">
+            <a:avLst/>
+          </a:prstGeom>
+          <a:noFill/>
+        </p:spPr>
+        <p:txBody>
+          <a:bodyPr wrap="square" lIns="0" rIns="0" tIns="0" bIns="0" anchor="t">
+            <a:spAutoFit/>
+          </a:bodyPr>
+          <a:lstStyle/>
+          <a:p>
+            <a:pPr algn="l"/>
+            <a:r>
+              <a:rPr sz="1100" b="1" i="0">
+                <a:solidFill>
+                  <a:srgbClr val="0F1F3D"/>
+                </a:solidFill>
+                <a:latin typeface="Calibri"/>
+              </a:rPr>
+              <a:t>Dimensionnement hors offre</a:t>
+            </a:r>
+          </a:p>
+        </p:txBody>
+      </p:sp>
+      <p:sp>
+        <p:nvSpPr>
+          <p:cNvPr id="46" name="TextBox 45"/>
+          <p:cNvSpPr txBox="1"/>
+          <p:nvPr/>
+        </p:nvSpPr>
+        <p:spPr>
+          <a:xfrm>
+            <a:off x="3527298" y="5276088"/>
+            <a:ext cx="2311146" cy="576072"/>
+          </a:xfrm>
+          <a:prstGeom prst="rect">
+            <a:avLst/>
+          </a:prstGeom>
+          <a:noFill/>
+        </p:spPr>
+        <p:txBody>
+          <a:bodyPr wrap="square" lIns="0" rIns="0" tIns="0" bIns="0" anchor="t">
+            <a:spAutoFit/>
+          </a:bodyPr>
+          <a:lstStyle/>
+          <a:p>
+            <a:pPr algn="l"/>
+            <a:r>
+              <a:rPr sz="900" b="0" i="0">
+                <a:solidFill>
+                  <a:srgbClr val="1E293B"/>
+                </a:solidFill>
+                <a:latin typeface="Calibri"/>
+              </a:rPr>
+              <a:t>Étude technique ponctuelle hors devis</a:t>
+            </a:r>
+          </a:p>
+        </p:txBody>
+      </p:sp>
+      <p:sp>
+        <p:nvSpPr>
+          <p:cNvPr id="47" name="Rounded Rectangle 46"/>
+          <p:cNvSpPr/>
+          <p:nvPr/>
+        </p:nvSpPr>
+        <p:spPr>
+          <a:xfrm>
+            <a:off x="6185916" y="4544568"/>
+            <a:ext cx="2676906" cy="1399032"/>
+          </a:xfrm>
+          <a:prstGeom prst="roundRect">
+            <a:avLst>
+              <a:gd name="adj" fmla="val 6000"/>
+            </a:avLst>
+          </a:prstGeom>
+          <a:solidFill>
+            <a:srgbClr val="F1F5F9"/>
+          </a:solidFill>
+          <a:ln w="6350">
+            <a:solidFill>
+              <a:srgbClr val="CBD5E1"/>
+            </a:solidFill>
+          </a:ln>
+          <a:effectLst/>
+        </p:spPr>
+        <p:style>
+          <a:lnRef idx="1">
+            <a:schemeClr val="accent1"/>
+          </a:lnRef>
+          <a:fillRef idx="3">
+            <a:schemeClr val="accent1"/>
+          </a:fillRef>
+          <a:effectRef idx="2">
+            <a:schemeClr val="accent1"/>
+          </a:effectRef>
+          <a:fontRef idx="minor">
+            <a:schemeClr val="lt1"/>
+          </a:fontRef>
+        </p:style>
+        <p:txBody>
+          <a:bodyPr rtlCol="0" anchor="ctr"/>
+          <a:lstStyle/>
+          <a:p>
+            <a:pPr algn="ctr"/>
+          </a:p>
+        </p:txBody>
+      </p:sp>
+      <p:sp>
+        <p:nvSpPr>
+          <p:cNvPr id="48" name="Rectangle 47"/>
+          <p:cNvSpPr/>
+          <p:nvPr/>
+        </p:nvSpPr>
+        <p:spPr>
+          <a:xfrm>
+            <a:off x="6185916" y="4544568"/>
+            <a:ext cx="2676906" cy="109728"/>
+          </a:xfrm>
+          <a:prstGeom prst="rect">
+            <a:avLst/>
+          </a:prstGeom>
+          <a:solidFill>
+            <a:srgbClr val="6D28D9"/>
+          </a:solidFill>
+          <a:ln>
+            <a:noFill/>
+          </a:ln>
+          <a:effectLst/>
+        </p:spPr>
+        <p:style>
+          <a:lnRef idx="1">
+            <a:schemeClr val="accent1"/>
+          </a:lnRef>
+          <a:fillRef idx="3">
+            <a:schemeClr val="accent1"/>
+          </a:fillRef>
+          <a:effectRef idx="2">
+            <a:schemeClr val="accent1"/>
+          </a:effectRef>
+          <a:fontRef idx="minor">
+            <a:schemeClr val="lt1"/>
+          </a:fontRef>
+        </p:style>
+        <p:txBody>
+          <a:bodyPr rtlCol="0" anchor="ctr"/>
+          <a:lstStyle/>
+          <a:p>
+            <a:pPr algn="ctr"/>
+          </a:p>
+        </p:txBody>
+      </p:sp>
+      <p:sp>
+        <p:nvSpPr>
+          <p:cNvPr id="49" name="TextBox 48"/>
+          <p:cNvSpPr txBox="1"/>
+          <p:nvPr/>
+        </p:nvSpPr>
+        <p:spPr>
+          <a:xfrm>
+            <a:off x="6368796" y="4818888"/>
+            <a:ext cx="2311146" cy="411480"/>
+          </a:xfrm>
+          <a:prstGeom prst="rect">
+            <a:avLst/>
+          </a:prstGeom>
+          <a:noFill/>
+        </p:spPr>
+        <p:txBody>
+          <a:bodyPr wrap="square" lIns="0" rIns="0" tIns="0" bIns="0" anchor="t">
+            <a:spAutoFit/>
+          </a:bodyPr>
+          <a:lstStyle/>
+          <a:p>
+            <a:pPr algn="l"/>
+            <a:r>
+              <a:rPr sz="1100" b="1" i="0">
+                <a:solidFill>
+                  <a:srgbClr val="0F1F3D"/>
+                </a:solidFill>
+                <a:latin typeface="Calibri"/>
+              </a:rPr>
+              <a:t>Offres commerciales</a:t>
+            </a:r>
+          </a:p>
+        </p:txBody>
+      </p:sp>
+      <p:sp>
+        <p:nvSpPr>
+          <p:cNvPr id="50" name="TextBox 49"/>
+          <p:cNvSpPr txBox="1"/>
+          <p:nvPr/>
+        </p:nvSpPr>
+        <p:spPr>
+          <a:xfrm>
+            <a:off x="6368796" y="5276088"/>
+            <a:ext cx="2311146" cy="576072"/>
+          </a:xfrm>
+          <a:prstGeom prst="rect">
+            <a:avLst/>
+          </a:prstGeom>
+          <a:noFill/>
+        </p:spPr>
+        <p:txBody>
+          <a:bodyPr wrap="square" lIns="0" rIns="0" tIns="0" bIns="0" anchor="t">
+            <a:spAutoFit/>
+          </a:bodyPr>
+          <a:lstStyle/>
+          <a:p>
+            <a:pPr algn="l"/>
+            <a:r>
+              <a:rPr sz="900" b="0" i="0">
+                <a:solidFill>
+                  <a:srgbClr val="1E293B"/>
+                </a:solidFill>
+                <a:latin typeface="Calibri"/>
+              </a:rPr>
+              <a:t>Chiffrage · rédaction offre · envoi client</a:t>
+            </a:r>
+          </a:p>
+        </p:txBody>
+      </p:sp>
+      <p:sp>
+        <p:nvSpPr>
+          <p:cNvPr id="51" name="Rounded Rectangle 50"/>
+          <p:cNvSpPr/>
+          <p:nvPr/>
+        </p:nvSpPr>
+        <p:spPr>
+          <a:xfrm>
+            <a:off x="9027414" y="4544568"/>
+            <a:ext cx="2676906" cy="1399032"/>
+          </a:xfrm>
+          <a:prstGeom prst="roundRect">
+            <a:avLst>
+              <a:gd name="adj" fmla="val 6000"/>
+            </a:avLst>
+          </a:prstGeom>
+          <a:solidFill>
+            <a:srgbClr val="F1F5F9"/>
+          </a:solidFill>
+          <a:ln w="6350">
+            <a:solidFill>
+              <a:srgbClr val="CBD5E1"/>
+            </a:solidFill>
+          </a:ln>
+          <a:effectLst/>
+        </p:spPr>
+        <p:style>
+          <a:lnRef idx="1">
+            <a:schemeClr val="accent1"/>
+          </a:lnRef>
+          <a:fillRef idx="3">
+            <a:schemeClr val="accent1"/>
+          </a:fillRef>
+          <a:effectRef idx="2">
+            <a:schemeClr val="accent1"/>
+          </a:effectRef>
+          <a:fontRef idx="minor">
+            <a:schemeClr val="lt1"/>
+          </a:fontRef>
+        </p:style>
+        <p:txBody>
+          <a:bodyPr rtlCol="0" anchor="ctr"/>
+          <a:lstStyle/>
+          <a:p>
+            <a:pPr algn="ctr"/>
+          </a:p>
+        </p:txBody>
+      </p:sp>
+      <p:sp>
+        <p:nvSpPr>
+          <p:cNvPr id="52" name="Rectangle 51"/>
+          <p:cNvSpPr/>
+          <p:nvPr/>
+        </p:nvSpPr>
+        <p:spPr>
+          <a:xfrm>
+            <a:off x="9027414" y="4544568"/>
+            <a:ext cx="2676906" cy="109728"/>
+          </a:xfrm>
+          <a:prstGeom prst="rect">
+            <a:avLst/>
+          </a:prstGeom>
+          <a:solidFill>
+            <a:srgbClr val="6D28D9"/>
+          </a:solidFill>
+          <a:ln>
+            <a:noFill/>
+          </a:ln>
+          <a:effectLst/>
+        </p:spPr>
+        <p:style>
+          <a:lnRef idx="1">
+            <a:schemeClr val="accent1"/>
+          </a:lnRef>
+          <a:fillRef idx="3">
+            <a:schemeClr val="accent1"/>
+          </a:fillRef>
+          <a:effectRef idx="2">
+            <a:schemeClr val="accent1"/>
+          </a:effectRef>
+          <a:fontRef idx="minor">
+            <a:schemeClr val="lt1"/>
+          </a:fontRef>
+        </p:style>
+        <p:txBody>
+          <a:bodyPr rtlCol="0" anchor="ctr"/>
+          <a:lstStyle/>
+          <a:p>
+            <a:pPr algn="ctr"/>
+          </a:p>
+        </p:txBody>
+      </p:sp>
+      <p:sp>
+        <p:nvSpPr>
+          <p:cNvPr id="53" name="TextBox 52"/>
+          <p:cNvSpPr txBox="1"/>
+          <p:nvPr/>
+        </p:nvSpPr>
+        <p:spPr>
+          <a:xfrm>
+            <a:off x="9210294" y="4818888"/>
+            <a:ext cx="2311146" cy="411480"/>
+          </a:xfrm>
+          <a:prstGeom prst="rect">
+            <a:avLst/>
+          </a:prstGeom>
+          <a:noFill/>
+        </p:spPr>
+        <p:txBody>
+          <a:bodyPr wrap="square" lIns="0" rIns="0" tIns="0" bIns="0" anchor="t">
+            <a:spAutoFit/>
+          </a:bodyPr>
+          <a:lstStyle/>
+          <a:p>
+            <a:pPr algn="l"/>
+            <a:r>
+              <a:rPr sz="1100" b="1" i="0">
+                <a:solidFill>
+                  <a:srgbClr val="0F1F3D"/>
+                </a:solidFill>
+                <a:latin typeface="Calibri"/>
+              </a:rPr>
+              <a:t>Autre étude</a:t>
+            </a:r>
+          </a:p>
+        </p:txBody>
+      </p:sp>
+      <p:sp>
+        <p:nvSpPr>
+          <p:cNvPr id="54" name="TextBox 53"/>
+          <p:cNvSpPr txBox="1"/>
+          <p:nvPr/>
+        </p:nvSpPr>
+        <p:spPr>
+          <a:xfrm>
+            <a:off x="9210294" y="5276088"/>
+            <a:ext cx="2311146" cy="576072"/>
+          </a:xfrm>
+          <a:prstGeom prst="rect">
+            <a:avLst/>
+          </a:prstGeom>
+          <a:noFill/>
+        </p:spPr>
+        <p:txBody>
+          <a:bodyPr wrap="square" lIns="0" rIns="0" tIns="0" bIns="0" anchor="t">
+            <a:spAutoFit/>
+          </a:bodyPr>
+          <a:lstStyle/>
+          <a:p>
+            <a:pPr algn="l"/>
+            <a:r>
+              <a:rPr sz="900" b="0" i="0">
+                <a:solidFill>
+                  <a:srgbClr val="1E293B"/>
+                </a:solidFill>
+                <a:latin typeface="Calibri"/>
+              </a:rPr>
+              <a:t>Prestations spécifiques / sur-mesure</a:t>
+            </a:r>
+          </a:p>
+        </p:txBody>
+      </p:sp>
+      <p:sp>
+        <p:nvSpPr>
+          <p:cNvPr id="55" name="TextBox 54"/>
+          <p:cNvSpPr txBox="1"/>
+          <p:nvPr/>
+        </p:nvSpPr>
+        <p:spPr>
+          <a:xfrm>
+            <a:off x="502920" y="6126480"/>
+            <a:ext cx="10972800" cy="365760"/>
+          </a:xfrm>
+          <a:prstGeom prst="rect">
+            <a:avLst/>
+          </a:prstGeom>
+          <a:noFill/>
+        </p:spPr>
+        <p:txBody>
+          <a:bodyPr wrap="square" lIns="0" rIns="0" tIns="0" bIns="0" anchor="t">
+            <a:spAutoFit/>
+          </a:bodyPr>
+          <a:lstStyle/>
+          <a:p>
+            <a:pPr algn="l"/>
+            <a:r>
+              <a:rPr sz="950" b="0" i="0">
+                <a:solidFill>
+                  <a:srgbClr val="64748B"/>
+                </a:solidFill>
+                <a:latin typeface="Calibri"/>
+              </a:rPr>
+              <a:t>Chaque demande BE génère automatiquement les sous-tâches du process choisi · chaque sous-tâche suit le cycle de vie en 9 statuts (cf. slide 1).</a:t>
+            </a:r>
+          </a:p>
+        </p:txBody>
+      </p:sp>
+      <p:sp>
+        <p:nvSpPr>
+          <p:cNvPr id="56" name="TextBox 55"/>
+          <p:cNvSpPr txBox="1"/>
+          <p:nvPr/>
+        </p:nvSpPr>
+        <p:spPr>
+          <a:xfrm>
+            <a:off x="502920" y="6492240"/>
+            <a:ext cx="10972800" cy="274320"/>
+          </a:xfrm>
+          <a:prstGeom prst="rect">
+            <a:avLst/>
+          </a:prstGeom>
+          <a:noFill/>
+        </p:spPr>
+        <p:txBody>
+          <a:bodyPr wrap="square" lIns="0" rIns="0" tIns="0" bIns="0" anchor="t">
+            <a:spAutoFit/>
+          </a:bodyPr>
+          <a:lstStyle/>
+          <a:p>
+            <a:pPr algn="l"/>
+            <a:r>
+              <a:rPr sz="800" b="0" i="1">
+                <a:solidFill>
+                  <a:srgbClr val="64748B"/>
+                </a:solidFill>
+                <a:latin typeface="Calibri"/>
+              </a:rPr>
+              <a:t>Source : supabase/seed/001_be_sub_process_templates.sql</a:t>
+            </a:r>
+          </a:p>
+        </p:txBody>
+      </p:sp>
+    </p:spTree>
+  </p:cSld>
+  <p:clrMapOvr>
+    <a:masterClrMapping/>
+  </p:clrMapOvr>
+</p:sld>
+</file>
+
+<file path=ppt/slides/slide3.xml><?xml version="1.0" encoding="utf-8"?>
+<p:sld xmlns:a="http://schemas.openxmlformats.org/drawingml/2006/main" xmlns:p="http://schemas.openxmlformats.org/presentationml/2006/main" xmlns:r="http://schemas.openxmlformats.org/officeDocument/2006/relationships">
+  <p:cSld>
+    <p:spTree>
+      <p:nvGrpSpPr>
+        <p:cNvPr id="1" name=""/>
+        <p:cNvGrpSpPr/>
+        <p:nvPr/>
+      </p:nvGrpSpPr>
+      <p:grpSpPr/>
+      <p:sp>
+        <p:nvSpPr>
+          <p:cNvPr id="2" name="Rectangle 1"/>
+          <p:cNvSpPr/>
+          <p:nvPr/>
+        </p:nvSpPr>
+        <p:spPr>
+          <a:xfrm>
+            <a:off x="0" y="0"/>
+            <a:ext cx="12191695" cy="6858000"/>
+          </a:xfrm>
+          <a:prstGeom prst="rect">
+            <a:avLst/>
+          </a:prstGeom>
+          <a:solidFill>
+            <a:srgbClr val="FFFFFF"/>
+          </a:solidFill>
+          <a:ln>
+            <a:noFill/>
+          </a:ln>
+          <a:effectLst/>
+        </p:spPr>
+        <p:style>
+          <a:lnRef idx="1">
+            <a:schemeClr val="accent1"/>
+          </a:lnRef>
+          <a:fillRef idx="3">
+            <a:schemeClr val="accent1"/>
+          </a:fillRef>
+          <a:effectRef idx="2">
+            <a:schemeClr val="accent1"/>
+          </a:effectRef>
+          <a:fontRef idx="minor">
+            <a:schemeClr val="lt1"/>
+          </a:fontRef>
+        </p:style>
+        <p:txBody>
+          <a:bodyPr rtlCol="0" anchor="ctr"/>
+          <a:lstStyle/>
+          <a:p>
+            <a:pPr algn="ctr"/>
+          </a:p>
+        </p:txBody>
+      </p:sp>
+      <p:sp>
+        <p:nvSpPr>
+          <p:cNvPr id="3" name="Rectangle 2"/>
+          <p:cNvSpPr/>
+          <p:nvPr/>
+        </p:nvSpPr>
+        <p:spPr>
+          <a:xfrm>
+            <a:off x="0" y="0"/>
+            <a:ext cx="228600" cy="6858000"/>
+          </a:xfrm>
+          <a:prstGeom prst="rect">
+            <a:avLst/>
+          </a:prstGeom>
+          <a:solidFill>
+            <a:srgbClr val="6D28D9"/>
+          </a:solidFill>
+          <a:ln>
+            <a:noFill/>
+          </a:ln>
+          <a:effectLst/>
+        </p:spPr>
+        <p:style>
+          <a:lnRef idx="1">
+            <a:schemeClr val="accent1"/>
+          </a:lnRef>
+          <a:fillRef idx="3">
+            <a:schemeClr val="accent1"/>
+          </a:fillRef>
+          <a:effectRef idx="2">
+            <a:schemeClr val="accent1"/>
+          </a:effectRef>
+          <a:fontRef idx="minor">
+            <a:schemeClr val="lt1"/>
+          </a:fontRef>
+        </p:style>
+        <p:txBody>
+          <a:bodyPr rtlCol="0" anchor="ctr"/>
+          <a:lstStyle/>
+          <a:p>
+            <a:pPr algn="ctr"/>
+          </a:p>
+        </p:txBody>
+      </p:sp>
+      <p:sp>
+        <p:nvSpPr>
+          <p:cNvPr id="4" name="TextBox 3"/>
+          <p:cNvSpPr txBox="1"/>
+          <p:nvPr/>
+        </p:nvSpPr>
+        <p:spPr>
+          <a:xfrm>
+            <a:off x="502920" y="274320"/>
+            <a:ext cx="10058400" cy="457200"/>
+          </a:xfrm>
+          <a:prstGeom prst="rect">
+            <a:avLst/>
+          </a:prstGeom>
+          <a:noFill/>
+        </p:spPr>
+        <p:txBody>
+          <a:bodyPr wrap="square" lIns="0" rIns="0" tIns="0" bIns="0" anchor="t">
+            <a:spAutoFit/>
+          </a:bodyPr>
+          <a:lstStyle/>
+          <a:p>
+            <a:pPr algn="l"/>
+            <a:r>
+              <a:rPr sz="2400" b="1" i="0">
+                <a:solidFill>
+                  <a:srgbClr val="0F1F3D"/>
+                </a:solidFill>
+                <a:latin typeface="Calibri"/>
+              </a:rPr>
+              <a:t>Flux BE — Diagramme de séquence</a:t>
+            </a:r>
+          </a:p>
+        </p:txBody>
+      </p:sp>
+      <p:sp>
+        <p:nvSpPr>
+          <p:cNvPr id="5" name="TextBox 4"/>
+          <p:cNvSpPr txBox="1"/>
+          <p:nvPr/>
+        </p:nvSpPr>
+        <p:spPr>
+          <a:xfrm>
+            <a:off x="502920" y="713232"/>
+            <a:ext cx="10058400" cy="320040"/>
+          </a:xfrm>
+          <a:prstGeom prst="rect">
+            <a:avLst/>
+          </a:prstGeom>
+          <a:noFill/>
+        </p:spPr>
+        <p:txBody>
+          <a:bodyPr wrap="square" lIns="0" rIns="0" tIns="0" bIns="0" anchor="t">
+            <a:spAutoFit/>
+          </a:bodyPr>
+          <a:lstStyle/>
+          <a:p>
+            <a:pPr algn="l"/>
+            <a:r>
+              <a:rPr sz="1200" b="0" i="0">
+                <a:solidFill>
+                  <a:srgbClr val="64748B"/>
+                </a:solidFill>
+                <a:latin typeface="Calibri"/>
+              </a:rPr>
+              <a:t>Parcours d'une prestation : Demandeur → Manager BE → Projeteur → Validateur</a:t>
+            </a:r>
+          </a:p>
+        </p:txBody>
+      </p:sp>
+      <p:sp>
+        <p:nvSpPr>
+          <p:cNvPr id="6" name="Rectangle 5"/>
+          <p:cNvSpPr/>
+          <p:nvPr/>
+        </p:nvSpPr>
+        <p:spPr>
+          <a:xfrm>
+            <a:off x="502920" y="1097280"/>
+            <a:ext cx="11201400" cy="12700"/>
+          </a:xfrm>
+          <a:prstGeom prst="rect">
+            <a:avLst/>
+          </a:prstGeom>
+          <a:solidFill>
+            <a:srgbClr val="CBD5E1"/>
+          </a:solidFill>
+          <a:ln>
+            <a:noFill/>
+          </a:ln>
+          <a:effectLst/>
+        </p:spPr>
+        <p:style>
+          <a:lnRef idx="1">
+            <a:schemeClr val="accent1"/>
+          </a:lnRef>
+          <a:fillRef idx="3">
+            <a:schemeClr val="accent1"/>
+          </a:fillRef>
+          <a:effectRef idx="2">
+            <a:schemeClr val="accent1"/>
+          </a:effectRef>
+          <a:fontRef idx="minor">
+            <a:schemeClr val="lt1"/>
+          </a:fontRef>
+        </p:style>
+        <p:txBody>
+          <a:bodyPr rtlCol="0" anchor="ctr"/>
+          <a:lstStyle/>
+          <a:p>
+            <a:pPr algn="ctr"/>
+          </a:p>
+        </p:txBody>
+      </p:sp>
+      <p:sp>
+        <p:nvSpPr>
+          <p:cNvPr id="7" name="Rounded Rectangle 6"/>
+          <p:cNvSpPr/>
+          <p:nvPr/>
+        </p:nvSpPr>
+        <p:spPr>
+          <a:xfrm>
+            <a:off x="502920" y="1371600"/>
+            <a:ext cx="2743200" cy="502920"/>
+          </a:xfrm>
+          <a:prstGeom prst="roundRect">
+            <a:avLst>
+              <a:gd name="adj" fmla="val 10000"/>
+            </a:avLst>
+          </a:prstGeom>
+          <a:solidFill>
+            <a:srgbClr val="0E7690"/>
+          </a:solidFill>
+          <a:ln>
+            <a:noFill/>
+          </a:ln>
+          <a:effectLst/>
+        </p:spPr>
+        <p:style>
+          <a:lnRef idx="1">
+            <a:schemeClr val="accent1"/>
+          </a:lnRef>
+          <a:fillRef idx="3">
+            <a:schemeClr val="accent1"/>
+          </a:fillRef>
+          <a:effectRef idx="2">
+            <a:schemeClr val="accent1"/>
+          </a:effectRef>
+          <a:fontRef idx="minor">
+            <a:schemeClr val="lt1"/>
+          </a:fontRef>
+        </p:style>
+        <p:txBody>
+          <a:bodyPr rtlCol="0" anchor="ctr"/>
+          <a:lstStyle/>
+          <a:p>
+            <a:pPr algn="ctr"/>
+          </a:p>
+        </p:txBody>
+      </p:sp>
+      <p:sp>
+        <p:nvSpPr>
+          <p:cNvPr id="8" name="TextBox 7"/>
+          <p:cNvSpPr txBox="1"/>
+          <p:nvPr/>
+        </p:nvSpPr>
+        <p:spPr>
+          <a:xfrm>
+            <a:off x="502920" y="1371600"/>
+            <a:ext cx="2743200" cy="292608"/>
+          </a:xfrm>
+          <a:prstGeom prst="rect">
+            <a:avLst/>
+          </a:prstGeom>
+          <a:noFill/>
+        </p:spPr>
+        <p:txBody>
+          <a:bodyPr wrap="square" lIns="0" rIns="0" tIns="0" bIns="0" anchor="ctr">
+            <a:spAutoFit/>
+          </a:bodyPr>
+          <a:lstStyle/>
+          <a:p>
+            <a:pPr algn="ctr"/>
+            <a:r>
+              <a:rPr sz="1100" b="1" i="0">
+                <a:solidFill>
+                  <a:srgbClr val="FFFFFF"/>
+                </a:solidFill>
+                <a:latin typeface="Calibri"/>
+              </a:rPr>
+              <a:t>Demandeur</a:t>
+            </a:r>
+          </a:p>
+        </p:txBody>
+      </p:sp>
+      <p:sp>
+        <p:nvSpPr>
+          <p:cNvPr id="9" name="TextBox 8"/>
+          <p:cNvSpPr txBox="1"/>
+          <p:nvPr/>
+        </p:nvSpPr>
+        <p:spPr>
+          <a:xfrm>
+            <a:off x="502920" y="1645920"/>
+            <a:ext cx="2743200" cy="228600"/>
+          </a:xfrm>
+          <a:prstGeom prst="rect">
+            <a:avLst/>
+          </a:prstGeom>
+          <a:noFill/>
+        </p:spPr>
+        <p:txBody>
+          <a:bodyPr wrap="square" lIns="0" rIns="0" tIns="0" bIns="0" anchor="ctr">
+            <a:spAutoFit/>
+          </a:bodyPr>
+          <a:lstStyle/>
+          <a:p>
+            <a:pPr algn="ctr"/>
+            <a:r>
+              <a:rPr sz="800" b="0" i="0">
+                <a:solidFill>
+                  <a:srgbClr val="FFFFFF"/>
+                </a:solidFill>
+                <a:latin typeface="Calibri"/>
+              </a:rPr>
+              <a:t>Florence / Marion</a:t>
+            </a:r>
+          </a:p>
+        </p:txBody>
+      </p:sp>
+      <p:sp>
+        <p:nvSpPr>
+          <p:cNvPr id="10" name="Rounded Rectangle 9"/>
+          <p:cNvSpPr/>
+          <p:nvPr/>
+        </p:nvSpPr>
+        <p:spPr>
+          <a:xfrm>
+            <a:off x="502920" y="1874520"/>
+            <a:ext cx="2743200" cy="4434840"/>
+          </a:xfrm>
+          <a:prstGeom prst="roundRect">
+            <a:avLst>
+              <a:gd name="adj" fmla="val 2000"/>
+            </a:avLst>
+          </a:prstGeom>
+          <a:solidFill>
+            <a:srgbClr val="F1F5F9"/>
+          </a:solidFill>
+          <a:ln w="6350">
+            <a:solidFill>
+              <a:srgbClr val="CBD5E1"/>
+            </a:solidFill>
+          </a:ln>
+          <a:effectLst/>
+        </p:spPr>
+        <p:style>
+          <a:lnRef idx="1">
+            <a:schemeClr val="accent1"/>
+          </a:lnRef>
+          <a:fillRef idx="3">
+            <a:schemeClr val="accent1"/>
+          </a:fillRef>
+          <a:effectRef idx="2">
+            <a:schemeClr val="accent1"/>
+          </a:effectRef>
+          <a:fontRef idx="minor">
+            <a:schemeClr val="lt1"/>
+          </a:fontRef>
+        </p:style>
+        <p:txBody>
+          <a:bodyPr rtlCol="0" anchor="ctr"/>
+          <a:lstStyle/>
+          <a:p>
+            <a:pPr algn="ctr"/>
+          </a:p>
+        </p:txBody>
+      </p:sp>
+      <p:sp>
+        <p:nvSpPr>
+          <p:cNvPr id="11" name="Rounded Rectangle 10"/>
+          <p:cNvSpPr/>
+          <p:nvPr/>
+        </p:nvSpPr>
+        <p:spPr>
+          <a:xfrm>
+            <a:off x="3337560" y="1371600"/>
+            <a:ext cx="2743200" cy="502920"/>
+          </a:xfrm>
+          <a:prstGeom prst="roundRect">
+            <a:avLst>
+              <a:gd name="adj" fmla="val 10000"/>
+            </a:avLst>
+          </a:prstGeom>
+          <a:solidFill>
+            <a:srgbClr val="6D28D9"/>
+          </a:solidFill>
+          <a:ln>
+            <a:noFill/>
+          </a:ln>
+          <a:effectLst/>
+        </p:spPr>
+        <p:style>
+          <a:lnRef idx="1">
+            <a:schemeClr val="accent1"/>
+          </a:lnRef>
+          <a:fillRef idx="3">
+            <a:schemeClr val="accent1"/>
+          </a:fillRef>
+          <a:effectRef idx="2">
+            <a:schemeClr val="accent1"/>
+          </a:effectRef>
+          <a:fontRef idx="minor">
+            <a:schemeClr val="lt1"/>
+          </a:fontRef>
+        </p:style>
+        <p:txBody>
+          <a:bodyPr rtlCol="0" anchor="ctr"/>
+          <a:lstStyle/>
+          <a:p>
+            <a:pPr algn="ctr"/>
+          </a:p>
+        </p:txBody>
+      </p:sp>
+      <p:sp>
+        <p:nvSpPr>
+          <p:cNvPr id="12" name="TextBox 11"/>
+          <p:cNvSpPr txBox="1"/>
+          <p:nvPr/>
+        </p:nvSpPr>
+        <p:spPr>
+          <a:xfrm>
+            <a:off x="3337560" y="1371600"/>
+            <a:ext cx="2743200" cy="292608"/>
+          </a:xfrm>
+          <a:prstGeom prst="rect">
+            <a:avLst/>
+          </a:prstGeom>
+          <a:noFill/>
+        </p:spPr>
+        <p:txBody>
+          <a:bodyPr wrap="square" lIns="0" rIns="0" tIns="0" bIns="0" anchor="ctr">
+            <a:spAutoFit/>
+          </a:bodyPr>
+          <a:lstStyle/>
+          <a:p>
+            <a:pPr algn="ctr"/>
+            <a:r>
+              <a:rPr sz="1100" b="1" i="0">
+                <a:solidFill>
+                  <a:srgbClr val="FFFFFF"/>
+                </a:solidFill>
+                <a:latin typeface="Calibri"/>
+              </a:rPr>
+              <a:t>Manager BE</a:t>
+            </a:r>
+          </a:p>
+        </p:txBody>
+      </p:sp>
+      <p:sp>
+        <p:nvSpPr>
+          <p:cNvPr id="13" name="TextBox 12"/>
+          <p:cNvSpPr txBox="1"/>
+          <p:nvPr/>
+        </p:nvSpPr>
+        <p:spPr>
+          <a:xfrm>
+            <a:off x="3337560" y="1645920"/>
+            <a:ext cx="2743200" cy="228600"/>
+          </a:xfrm>
+          <a:prstGeom prst="rect">
+            <a:avLst/>
+          </a:prstGeom>
+          <a:noFill/>
+        </p:spPr>
+        <p:txBody>
+          <a:bodyPr wrap="square" lIns="0" rIns="0" tIns="0" bIns="0" anchor="ctr">
+            <a:spAutoFit/>
+          </a:bodyPr>
+          <a:lstStyle/>
+          <a:p>
+            <a:pPr algn="ctr"/>
+            <a:r>
+              <a:rPr sz="800" b="0" i="0">
+                <a:solidFill>
+                  <a:srgbClr val="FFFFFF"/>
+                </a:solidFill>
+                <a:latin typeface="Calibri"/>
+              </a:rPr>
+              <a:t>Germain (dispatch)</a:t>
+            </a:r>
+          </a:p>
+        </p:txBody>
+      </p:sp>
+      <p:sp>
+        <p:nvSpPr>
+          <p:cNvPr id="14" name="Rounded Rectangle 13"/>
+          <p:cNvSpPr/>
+          <p:nvPr/>
+        </p:nvSpPr>
+        <p:spPr>
+          <a:xfrm>
+            <a:off x="3337560" y="1874520"/>
+            <a:ext cx="2743200" cy="4434840"/>
+          </a:xfrm>
+          <a:prstGeom prst="roundRect">
+            <a:avLst>
+              <a:gd name="adj" fmla="val 2000"/>
+            </a:avLst>
+          </a:prstGeom>
+          <a:solidFill>
+            <a:srgbClr val="F1F5F9"/>
+          </a:solidFill>
+          <a:ln w="6350">
+            <a:solidFill>
+              <a:srgbClr val="CBD5E1"/>
+            </a:solidFill>
+          </a:ln>
+          <a:effectLst/>
+        </p:spPr>
+        <p:style>
+          <a:lnRef idx="1">
+            <a:schemeClr val="accent1"/>
+          </a:lnRef>
+          <a:fillRef idx="3">
+            <a:schemeClr val="accent1"/>
+          </a:fillRef>
+          <a:effectRef idx="2">
+            <a:schemeClr val="accent1"/>
+          </a:effectRef>
+          <a:fontRef idx="minor">
+            <a:schemeClr val="lt1"/>
+          </a:fontRef>
+        </p:style>
+        <p:txBody>
+          <a:bodyPr rtlCol="0" anchor="ctr"/>
+          <a:lstStyle/>
+          <a:p>
+            <a:pPr algn="ctr"/>
+          </a:p>
+        </p:txBody>
+      </p:sp>
+      <p:sp>
+        <p:nvSpPr>
+          <p:cNvPr id="15" name="Rounded Rectangle 14"/>
+          <p:cNvSpPr/>
+          <p:nvPr/>
+        </p:nvSpPr>
+        <p:spPr>
+          <a:xfrm>
+            <a:off x="6172200" y="1371600"/>
+            <a:ext cx="2743200" cy="502920"/>
+          </a:xfrm>
+          <a:prstGeom prst="roundRect">
+            <a:avLst>
+              <a:gd name="adj" fmla="val 10000"/>
+            </a:avLst>
+          </a:prstGeom>
+          <a:solidFill>
+            <a:srgbClr val="2563EB"/>
+          </a:solidFill>
+          <a:ln>
+            <a:noFill/>
+          </a:ln>
+          <a:effectLst/>
+        </p:spPr>
+        <p:style>
+          <a:lnRef idx="1">
+            <a:schemeClr val="accent1"/>
+          </a:lnRef>
+          <a:fillRef idx="3">
+            <a:schemeClr val="accent1"/>
+          </a:fillRef>
+          <a:effectRef idx="2">
+            <a:schemeClr val="accent1"/>
+          </a:effectRef>
+          <a:fontRef idx="minor">
+            <a:schemeClr val="lt1"/>
+          </a:fontRef>
+        </p:style>
+        <p:txBody>
+          <a:bodyPr rtlCol="0" anchor="ctr"/>
+          <a:lstStyle/>
+          <a:p>
+            <a:pPr algn="ctr"/>
+          </a:p>
+        </p:txBody>
+      </p:sp>
+      <p:sp>
+        <p:nvSpPr>
+          <p:cNvPr id="16" name="TextBox 15"/>
+          <p:cNvSpPr txBox="1"/>
+          <p:nvPr/>
+        </p:nvSpPr>
+        <p:spPr>
+          <a:xfrm>
+            <a:off x="6172200" y="1371600"/>
+            <a:ext cx="2743200" cy="292608"/>
+          </a:xfrm>
+          <a:prstGeom prst="rect">
+            <a:avLst/>
+          </a:prstGeom>
+          <a:noFill/>
+        </p:spPr>
+        <p:txBody>
+          <a:bodyPr wrap="square" lIns="0" rIns="0" tIns="0" bIns="0" anchor="ctr">
+            <a:spAutoFit/>
+          </a:bodyPr>
+          <a:lstStyle/>
+          <a:p>
+            <a:pPr algn="ctr"/>
+            <a:r>
+              <a:rPr sz="1100" b="1" i="0">
+                <a:solidFill>
+                  <a:srgbClr val="FFFFFF"/>
+                </a:solidFill>
+                <a:latin typeface="Calibri"/>
+              </a:rPr>
+              <a:t>Projeteur</a:t>
+            </a:r>
+          </a:p>
+        </p:txBody>
+      </p:sp>
+      <p:sp>
+        <p:nvSpPr>
+          <p:cNvPr id="17" name="TextBox 16"/>
+          <p:cNvSpPr txBox="1"/>
+          <p:nvPr/>
+        </p:nvSpPr>
+        <p:spPr>
+          <a:xfrm>
+            <a:off x="6172200" y="1645920"/>
+            <a:ext cx="2743200" cy="228600"/>
+          </a:xfrm>
+          <a:prstGeom prst="rect">
+            <a:avLst/>
+          </a:prstGeom>
+          <a:noFill/>
+        </p:spPr>
+        <p:txBody>
+          <a:bodyPr wrap="square" lIns="0" rIns="0" tIns="0" bIns="0" anchor="ctr">
+            <a:spAutoFit/>
+          </a:bodyPr>
+          <a:lstStyle/>
+          <a:p>
+            <a:pPr algn="ctr"/>
+            <a:r>
+              <a:rPr sz="800" b="0" i="0">
+                <a:solidFill>
+                  <a:srgbClr val="FFFFFF"/>
+                </a:solidFill>
+                <a:latin typeface="Calibri"/>
+              </a:rPr>
+              <a:t>Guillaume Moriceau</a:t>
+            </a:r>
+          </a:p>
+        </p:txBody>
+      </p:sp>
+      <p:sp>
+        <p:nvSpPr>
+          <p:cNvPr id="18" name="Rounded Rectangle 17"/>
+          <p:cNvSpPr/>
+          <p:nvPr/>
+        </p:nvSpPr>
+        <p:spPr>
+          <a:xfrm>
+            <a:off x="6172200" y="1874520"/>
+            <a:ext cx="2743200" cy="4434840"/>
+          </a:xfrm>
+          <a:prstGeom prst="roundRect">
+            <a:avLst>
+              <a:gd name="adj" fmla="val 2000"/>
+            </a:avLst>
+          </a:prstGeom>
+          <a:solidFill>
+            <a:srgbClr val="F1F5F9"/>
+          </a:solidFill>
+          <a:ln w="6350">
+            <a:solidFill>
+              <a:srgbClr val="CBD5E1"/>
+            </a:solidFill>
+          </a:ln>
+          <a:effectLst/>
+        </p:spPr>
+        <p:style>
+          <a:lnRef idx="1">
+            <a:schemeClr val="accent1"/>
+          </a:lnRef>
+          <a:fillRef idx="3">
+            <a:schemeClr val="accent1"/>
+          </a:fillRef>
+          <a:effectRef idx="2">
+            <a:schemeClr val="accent1"/>
+          </a:effectRef>
+          <a:fontRef idx="minor">
+            <a:schemeClr val="lt1"/>
+          </a:fontRef>
+        </p:style>
+        <p:txBody>
+          <a:bodyPr rtlCol="0" anchor="ctr"/>
+          <a:lstStyle/>
+          <a:p>
+            <a:pPr algn="ctr"/>
+          </a:p>
+        </p:txBody>
+      </p:sp>
+      <p:sp>
+        <p:nvSpPr>
+          <p:cNvPr id="19" name="Rounded Rectangle 18"/>
+          <p:cNvSpPr/>
+          <p:nvPr/>
+        </p:nvSpPr>
+        <p:spPr>
+          <a:xfrm>
+            <a:off x="9006840" y="1371600"/>
+            <a:ext cx="2743200" cy="502920"/>
+          </a:xfrm>
+          <a:prstGeom prst="roundRect">
+            <a:avLst>
+              <a:gd name="adj" fmla="val 10000"/>
+            </a:avLst>
+          </a:prstGeom>
+          <a:solidFill>
+            <a:srgbClr val="B45309"/>
+          </a:solidFill>
+          <a:ln>
+            <a:noFill/>
+          </a:ln>
+          <a:effectLst/>
+        </p:spPr>
+        <p:style>
+          <a:lnRef idx="1">
+            <a:schemeClr val="accent1"/>
+          </a:lnRef>
+          <a:fillRef idx="3">
+            <a:schemeClr val="accent1"/>
+          </a:fillRef>
+          <a:effectRef idx="2">
+            <a:schemeClr val="accent1"/>
+          </a:effectRef>
+          <a:fontRef idx="minor">
+            <a:schemeClr val="lt1"/>
+          </a:fontRef>
+        </p:style>
+        <p:txBody>
+          <a:bodyPr rtlCol="0" anchor="ctr"/>
+          <a:lstStyle/>
+          <a:p>
+            <a:pPr algn="ctr"/>
+          </a:p>
+        </p:txBody>
+      </p:sp>
+      <p:sp>
+        <p:nvSpPr>
+          <p:cNvPr id="20" name="TextBox 19"/>
+          <p:cNvSpPr txBox="1"/>
+          <p:nvPr/>
+        </p:nvSpPr>
+        <p:spPr>
+          <a:xfrm>
+            <a:off x="9006840" y="1371600"/>
+            <a:ext cx="2743200" cy="292608"/>
+          </a:xfrm>
+          <a:prstGeom prst="rect">
+            <a:avLst/>
+          </a:prstGeom>
+          <a:noFill/>
+        </p:spPr>
+        <p:txBody>
+          <a:bodyPr wrap="square" lIns="0" rIns="0" tIns="0" bIns="0" anchor="ctr">
+            <a:spAutoFit/>
+          </a:bodyPr>
+          <a:lstStyle/>
+          <a:p>
+            <a:pPr algn="ctr"/>
+            <a:r>
+              <a:rPr sz="1100" b="1" i="0">
+                <a:solidFill>
+                  <a:srgbClr val="FFFFFF"/>
+                </a:solidFill>
+                <a:latin typeface="Calibri"/>
+              </a:rPr>
+              <a:t>Validateur</a:t>
+            </a:r>
+          </a:p>
+        </p:txBody>
+      </p:sp>
+      <p:sp>
+        <p:nvSpPr>
+          <p:cNvPr id="21" name="TextBox 20"/>
+          <p:cNvSpPr txBox="1"/>
+          <p:nvPr/>
+        </p:nvSpPr>
+        <p:spPr>
+          <a:xfrm>
+            <a:off x="9006840" y="1645920"/>
+            <a:ext cx="2743200" cy="228600"/>
+          </a:xfrm>
+          <a:prstGeom prst="rect">
+            <a:avLst/>
+          </a:prstGeom>
+          <a:noFill/>
+        </p:spPr>
+        <p:txBody>
+          <a:bodyPr wrap="square" lIns="0" rIns="0" tIns="0" bIns="0" anchor="ctr">
+            <a:spAutoFit/>
+          </a:bodyPr>
+          <a:lstStyle/>
+          <a:p>
+            <a:pPr algn="ctr"/>
+            <a:r>
+              <a:rPr sz="800" b="0" i="0">
+                <a:solidFill>
+                  <a:srgbClr val="FFFFFF"/>
+                </a:solidFill>
+                <a:latin typeface="Calibri"/>
+              </a:rPr>
+              <a:t>Chef BE / pair</a:t>
+            </a:r>
+          </a:p>
+        </p:txBody>
+      </p:sp>
+      <p:sp>
+        <p:nvSpPr>
+          <p:cNvPr id="22" name="Rounded Rectangle 21"/>
+          <p:cNvSpPr/>
+          <p:nvPr/>
+        </p:nvSpPr>
+        <p:spPr>
+          <a:xfrm>
+            <a:off x="9006840" y="1874520"/>
+            <a:ext cx="2743200" cy="4434840"/>
+          </a:xfrm>
+          <a:prstGeom prst="roundRect">
+            <a:avLst>
+              <a:gd name="adj" fmla="val 2000"/>
+            </a:avLst>
+          </a:prstGeom>
+          <a:solidFill>
+            <a:srgbClr val="F1F5F9"/>
+          </a:solidFill>
+          <a:ln w="6350">
+            <a:solidFill>
+              <a:srgbClr val="CBD5E1"/>
+            </a:solidFill>
+          </a:ln>
+          <a:effectLst/>
+        </p:spPr>
+        <p:style>
+          <a:lnRef idx="1">
+            <a:schemeClr val="accent1"/>
+          </a:lnRef>
+          <a:fillRef idx="3">
+            <a:schemeClr val="accent1"/>
+          </a:fillRef>
+          <a:effectRef idx="2">
+            <a:schemeClr val="accent1"/>
+          </a:effectRef>
+          <a:fontRef idx="minor">
+            <a:schemeClr val="lt1"/>
+          </a:fontRef>
+        </p:style>
+        <p:txBody>
+          <a:bodyPr rtlCol="0" anchor="ctr"/>
+          <a:lstStyle/>
+          <a:p>
+            <a:pPr algn="ctr"/>
+          </a:p>
+        </p:txBody>
+      </p:sp>
+      <p:sp>
+        <p:nvSpPr>
+          <p:cNvPr id="23" name="Rounded Rectangle 22"/>
+          <p:cNvSpPr/>
+          <p:nvPr/>
+        </p:nvSpPr>
+        <p:spPr>
+          <a:xfrm>
+            <a:off x="685800" y="2103120"/>
+            <a:ext cx="2377440" cy="457200"/>
+          </a:xfrm>
+          <a:prstGeom prst="roundRect">
+            <a:avLst>
+              <a:gd name="adj" fmla="val 30000"/>
+            </a:avLst>
+          </a:prstGeom>
+          <a:solidFill>
+            <a:srgbClr val="94A3B8"/>
+          </a:solidFill>
+          <a:ln>
+            <a:noFill/>
+          </a:ln>
+          <a:effectLst/>
+        </p:spPr>
+        <p:style>
+          <a:lnRef idx="1">
+            <a:schemeClr val="accent1"/>
+          </a:lnRef>
+          <a:fillRef idx="3">
+            <a:schemeClr val="accent1"/>
+          </a:fillRef>
+          <a:effectRef idx="2">
+            <a:schemeClr val="accent1"/>
+          </a:effectRef>
+          <a:fontRef idx="minor">
+            <a:schemeClr val="lt1"/>
+          </a:fontRef>
+        </p:style>
+        <p:txBody>
+          <a:bodyPr rtlCol="0" anchor="ctr"/>
+          <a:lstStyle/>
+          <a:p>
+            <a:pPr algn="ctr"/>
+          </a:p>
+        </p:txBody>
+      </p:sp>
+      <p:sp>
+        <p:nvSpPr>
+          <p:cNvPr id="24" name="TextBox 23"/>
+          <p:cNvSpPr txBox="1"/>
+          <p:nvPr/>
+        </p:nvSpPr>
+        <p:spPr>
+          <a:xfrm>
+            <a:off x="685800" y="2103120"/>
+            <a:ext cx="2377440" cy="457200"/>
+          </a:xfrm>
+          <a:prstGeom prst="rect">
+            <a:avLst/>
+          </a:prstGeom>
+          <a:noFill/>
+        </p:spPr>
+        <p:txBody>
+          <a:bodyPr wrap="square" lIns="0" rIns="0" tIns="0" bIns="0" anchor="ctr">
+            <a:spAutoFit/>
+          </a:bodyPr>
+          <a:lstStyle/>
+          <a:p>
+            <a:pPr algn="ctr"/>
+            <a:r>
+              <a:rPr sz="900" b="1" i="0">
+                <a:solidFill>
+                  <a:srgbClr val="FFFFFF"/>
+                </a:solidFill>
+                <a:latin typeface="Calibri"/>
+              </a:rPr>
+              <a:t>1. Dépose la demande</a:t>
+            </a:r>
+          </a:p>
+          <a:p>
+            <a:pPr algn="ctr"/>
+            <a:r>
+              <a:rPr sz="900" b="1" i="0">
+                <a:solidFill>
+                  <a:srgbClr val="FFFFFF"/>
+                </a:solidFill>
+                <a:latin typeface="Calibri"/>
+              </a:rPr>
+              <a:t>(soumise)</a:t>
+            </a:r>
+          </a:p>
+        </p:txBody>
+      </p:sp>
+      <p:sp>
+        <p:nvSpPr>
+          <p:cNvPr id="25" name="Rounded Rectangle 24"/>
+          <p:cNvSpPr/>
+          <p:nvPr/>
+        </p:nvSpPr>
+        <p:spPr>
+          <a:xfrm>
+            <a:off x="3520440" y="2743200"/>
+            <a:ext cx="2377440" cy="457200"/>
+          </a:xfrm>
+          <a:prstGeom prst="roundRect">
+            <a:avLst>
+              <a:gd name="adj" fmla="val 30000"/>
+            </a:avLst>
+          </a:prstGeom>
+          <a:solidFill>
+            <a:srgbClr val="6366F1"/>
+          </a:solidFill>
+          <a:ln>
+            <a:noFill/>
+          </a:ln>
+          <a:effectLst/>
+        </p:spPr>
+        <p:style>
+          <a:lnRef idx="1">
+            <a:schemeClr val="accent1"/>
+          </a:lnRef>
+          <a:fillRef idx="3">
+            <a:schemeClr val="accent1"/>
+          </a:fillRef>
+          <a:effectRef idx="2">
+            <a:schemeClr val="accent1"/>
+          </a:effectRef>
+          <a:fontRef idx="minor">
+            <a:schemeClr val="lt1"/>
+          </a:fontRef>
+        </p:style>
+        <p:txBody>
+          <a:bodyPr rtlCol="0" anchor="ctr"/>
+          <a:lstStyle/>
+          <a:p>
+            <a:pPr algn="ctr"/>
+          </a:p>
+        </p:txBody>
+      </p:sp>
+      <p:sp>
+        <p:nvSpPr>
+          <p:cNvPr id="26" name="TextBox 25"/>
+          <p:cNvSpPr txBox="1"/>
+          <p:nvPr/>
+        </p:nvSpPr>
+        <p:spPr>
+          <a:xfrm>
+            <a:off x="3520440" y="2743200"/>
+            <a:ext cx="2377440" cy="457200"/>
+          </a:xfrm>
+          <a:prstGeom prst="rect">
+            <a:avLst/>
+          </a:prstGeom>
+          <a:noFill/>
+        </p:spPr>
+        <p:txBody>
+          <a:bodyPr wrap="square" lIns="0" rIns="0" tIns="0" bIns="0" anchor="ctr">
+            <a:spAutoFit/>
+          </a:bodyPr>
+          <a:lstStyle/>
+          <a:p>
+            <a:pPr algn="ctr"/>
+            <a:r>
+              <a:rPr sz="900" b="1" i="0">
+                <a:solidFill>
+                  <a:srgbClr val="FFFFFF"/>
+                </a:solidFill>
+                <a:latin typeface="Calibri"/>
+              </a:rPr>
+              <a:t>2. Affecte</a:t>
+            </a:r>
+          </a:p>
+          <a:p>
+            <a:pPr algn="ctr"/>
+            <a:r>
+              <a:rPr sz="900" b="1" i="0">
+                <a:solidFill>
+                  <a:srgbClr val="FFFFFF"/>
+                </a:solidFill>
+                <a:latin typeface="Calibri"/>
+              </a:rPr>
+              <a:t>(affectée)</a:t>
+            </a:r>
+          </a:p>
+        </p:txBody>
+      </p:sp>
+      <p:sp>
+        <p:nvSpPr>
+          <p:cNvPr id="27" name="Rounded Rectangle 26"/>
+          <p:cNvSpPr/>
+          <p:nvPr/>
+        </p:nvSpPr>
+        <p:spPr>
+          <a:xfrm>
+            <a:off x="6355080" y="3383280"/>
+            <a:ext cx="2377440" cy="457200"/>
+          </a:xfrm>
+          <a:prstGeom prst="roundRect">
+            <a:avLst>
+              <a:gd name="adj" fmla="val 30000"/>
+            </a:avLst>
+          </a:prstGeom>
+          <a:solidFill>
+            <a:srgbClr val="3B82F6"/>
+          </a:solidFill>
+          <a:ln>
+            <a:noFill/>
+          </a:ln>
+          <a:effectLst/>
+        </p:spPr>
+        <p:style>
+          <a:lnRef idx="1">
+            <a:schemeClr val="accent1"/>
+          </a:lnRef>
+          <a:fillRef idx="3">
+            <a:schemeClr val="accent1"/>
+          </a:fillRef>
+          <a:effectRef idx="2">
+            <a:schemeClr val="accent1"/>
+          </a:effectRef>
+          <a:fontRef idx="minor">
+            <a:schemeClr val="lt1"/>
+          </a:fontRef>
+        </p:style>
+        <p:txBody>
+          <a:bodyPr rtlCol="0" anchor="ctr"/>
+          <a:lstStyle/>
+          <a:p>
+            <a:pPr algn="ctr"/>
+          </a:p>
+        </p:txBody>
+      </p:sp>
+      <p:sp>
+        <p:nvSpPr>
+          <p:cNvPr id="28" name="TextBox 27"/>
+          <p:cNvSpPr txBox="1"/>
+          <p:nvPr/>
+        </p:nvSpPr>
+        <p:spPr>
+          <a:xfrm>
+            <a:off x="6355080" y="3383280"/>
+            <a:ext cx="2377440" cy="457200"/>
+          </a:xfrm>
+          <a:prstGeom prst="rect">
+            <a:avLst/>
+          </a:prstGeom>
+          <a:noFill/>
+        </p:spPr>
+        <p:txBody>
+          <a:bodyPr wrap="square" lIns="0" rIns="0" tIns="0" bIns="0" anchor="ctr">
+            <a:spAutoFit/>
+          </a:bodyPr>
+          <a:lstStyle/>
+          <a:p>
+            <a:pPr algn="ctr"/>
+            <a:r>
+              <a:rPr sz="900" b="1" i="0">
+                <a:solidFill>
+                  <a:srgbClr val="FFFFFF"/>
+                </a:solidFill>
+                <a:latin typeface="Calibri"/>
+              </a:rPr>
+              <a:t>3. Commence</a:t>
+            </a:r>
+          </a:p>
+          <a:p>
+            <a:pPr algn="ctr"/>
+            <a:r>
+              <a:rPr sz="900" b="1" i="0">
+                <a:solidFill>
+                  <a:srgbClr val="FFFFFF"/>
+                </a:solidFill>
+                <a:latin typeface="Calibri"/>
+              </a:rPr>
+              <a:t>(en cours)</a:t>
+            </a:r>
+          </a:p>
+        </p:txBody>
+      </p:sp>
+      <p:sp>
+        <p:nvSpPr>
+          <p:cNvPr id="29" name="Rounded Rectangle 28"/>
+          <p:cNvSpPr/>
+          <p:nvPr/>
+        </p:nvSpPr>
+        <p:spPr>
+          <a:xfrm>
+            <a:off x="3520440" y="4023360"/>
+            <a:ext cx="2377440" cy="457200"/>
+          </a:xfrm>
+          <a:prstGeom prst="roundRect">
+            <a:avLst>
+              <a:gd name="adj" fmla="val 30000"/>
+            </a:avLst>
+          </a:prstGeom>
+          <a:solidFill>
+            <a:srgbClr val="A855F7"/>
+          </a:solidFill>
+          <a:ln>
+            <a:noFill/>
+          </a:ln>
+          <a:effectLst/>
+        </p:spPr>
+        <p:style>
+          <a:lnRef idx="1">
+            <a:schemeClr val="accent1"/>
+          </a:lnRef>
+          <a:fillRef idx="3">
+            <a:schemeClr val="accent1"/>
+          </a:fillRef>
+          <a:effectRef idx="2">
+            <a:schemeClr val="accent1"/>
+          </a:effectRef>
+          <a:fontRef idx="minor">
+            <a:schemeClr val="lt1"/>
+          </a:fontRef>
+        </p:style>
+        <p:txBody>
+          <a:bodyPr rtlCol="0" anchor="ctr"/>
+          <a:lstStyle/>
+          <a:p>
+            <a:pPr algn="ctr"/>
+          </a:p>
+        </p:txBody>
+      </p:sp>
+      <p:sp>
+        <p:nvSpPr>
+          <p:cNvPr id="30" name="TextBox 29"/>
+          <p:cNvSpPr txBox="1"/>
+          <p:nvPr/>
+        </p:nvSpPr>
+        <p:spPr>
+          <a:xfrm>
+            <a:off x="3520440" y="4023360"/>
+            <a:ext cx="2377440" cy="457200"/>
+          </a:xfrm>
+          <a:prstGeom prst="rect">
+            <a:avLst/>
+          </a:prstGeom>
+          <a:noFill/>
+        </p:spPr>
+        <p:txBody>
+          <a:bodyPr wrap="square" lIns="0" rIns="0" tIns="0" bIns="0" anchor="ctr">
+            <a:spAutoFit/>
+          </a:bodyPr>
+          <a:lstStyle/>
+          <a:p>
+            <a:pPr algn="ctr"/>
+            <a:r>
+              <a:rPr sz="900" b="1" i="0">
+                <a:solidFill>
+                  <a:srgbClr val="FFFFFF"/>
+                </a:solidFill>
+                <a:latin typeface="Calibri"/>
+              </a:rPr>
+              <a:t>4. Relit</a:t>
+            </a:r>
+          </a:p>
+          <a:p>
+            <a:pPr algn="ctr"/>
+            <a:r>
+              <a:rPr sz="900" b="1" i="0">
+                <a:solidFill>
+                  <a:srgbClr val="FFFFFF"/>
+                </a:solidFill>
+                <a:latin typeface="Calibri"/>
+              </a:rPr>
+              <a:t>(à relire)</a:t>
+            </a:r>
+          </a:p>
+        </p:txBody>
+      </p:sp>
+      <p:sp>
+        <p:nvSpPr>
+          <p:cNvPr id="31" name="Rounded Rectangle 30"/>
+          <p:cNvSpPr/>
+          <p:nvPr/>
+        </p:nvSpPr>
+        <p:spPr>
+          <a:xfrm>
+            <a:off x="9189720" y="4023360"/>
+            <a:ext cx="2377440" cy="457200"/>
+          </a:xfrm>
+          <a:prstGeom prst="roundRect">
+            <a:avLst>
+              <a:gd name="adj" fmla="val 30000"/>
+            </a:avLst>
+          </a:prstGeom>
+          <a:solidFill>
+            <a:srgbClr val="F59E0B"/>
+          </a:solidFill>
+          <a:ln>
+            <a:noFill/>
+          </a:ln>
+          <a:effectLst/>
+        </p:spPr>
+        <p:style>
+          <a:lnRef idx="1">
+            <a:schemeClr val="accent1"/>
+          </a:lnRef>
+          <a:fillRef idx="3">
+            <a:schemeClr val="accent1"/>
+          </a:fillRef>
+          <a:effectRef idx="2">
+            <a:schemeClr val="accent1"/>
+          </a:effectRef>
+          <a:fontRef idx="minor">
+            <a:schemeClr val="lt1"/>
+          </a:fontRef>
+        </p:style>
+        <p:txBody>
+          <a:bodyPr rtlCol="0" anchor="ctr"/>
+          <a:lstStyle/>
+          <a:p>
+            <a:pPr algn="ctr"/>
+          </a:p>
+        </p:txBody>
+      </p:sp>
+      <p:sp>
+        <p:nvSpPr>
+          <p:cNvPr id="32" name="TextBox 31"/>
+          <p:cNvSpPr txBox="1"/>
+          <p:nvPr/>
+        </p:nvSpPr>
+        <p:spPr>
+          <a:xfrm>
+            <a:off x="9189720" y="4023360"/>
+            <a:ext cx="2377440" cy="457200"/>
+          </a:xfrm>
+          <a:prstGeom prst="rect">
+            <a:avLst/>
+          </a:prstGeom>
+          <a:noFill/>
+        </p:spPr>
+        <p:txBody>
+          <a:bodyPr wrap="square" lIns="0" rIns="0" tIns="0" bIns="0" anchor="ctr">
+            <a:spAutoFit/>
+          </a:bodyPr>
+          <a:lstStyle/>
+          <a:p>
+            <a:pPr algn="ctr"/>
+            <a:r>
+              <a:rPr sz="900" b="1" i="0">
+                <a:solidFill>
+                  <a:srgbClr val="FFFFFF"/>
+                </a:solidFill>
+                <a:latin typeface="Calibri"/>
+              </a:rPr>
+              <a:t>5. Valide</a:t>
+            </a:r>
+          </a:p>
+          <a:p>
+            <a:pPr algn="ctr"/>
+            <a:r>
+              <a:rPr sz="900" b="1" i="0">
+                <a:solidFill>
+                  <a:srgbClr val="FFFFFF"/>
+                </a:solidFill>
+                <a:latin typeface="Calibri"/>
+              </a:rPr>
+              <a:t>(à valider)</a:t>
+            </a:r>
+          </a:p>
+        </p:txBody>
+      </p:sp>
+      <p:sp>
+        <p:nvSpPr>
+          <p:cNvPr id="33" name="Rounded Rectangle 32"/>
+          <p:cNvSpPr/>
+          <p:nvPr/>
+        </p:nvSpPr>
+        <p:spPr>
+          <a:xfrm>
+            <a:off x="3520440" y="4663440"/>
+            <a:ext cx="2377440" cy="457200"/>
+          </a:xfrm>
+          <a:prstGeom prst="roundRect">
+            <a:avLst>
+              <a:gd name="adj" fmla="val 30000"/>
+            </a:avLst>
+          </a:prstGeom>
+          <a:solidFill>
+            <a:srgbClr val="06B6D4"/>
+          </a:solidFill>
+          <a:ln>
+            <a:noFill/>
+          </a:ln>
+          <a:effectLst/>
+        </p:spPr>
+        <p:style>
+          <a:lnRef idx="1">
+            <a:schemeClr val="accent1"/>
+          </a:lnRef>
+          <a:fillRef idx="3">
+            <a:schemeClr val="accent1"/>
+          </a:fillRef>
+          <a:effectRef idx="2">
+            <a:schemeClr val="accent1"/>
+          </a:effectRef>
+          <a:fontRef idx="minor">
+            <a:schemeClr val="lt1"/>
+          </a:fontRef>
+        </p:style>
+        <p:txBody>
+          <a:bodyPr rtlCol="0" anchor="ctr"/>
+          <a:lstStyle/>
+          <a:p>
+            <a:pPr algn="ctr"/>
+          </a:p>
+        </p:txBody>
+      </p:sp>
+      <p:sp>
+        <p:nvSpPr>
+          <p:cNvPr id="34" name="TextBox 33"/>
+          <p:cNvSpPr txBox="1"/>
+          <p:nvPr/>
+        </p:nvSpPr>
+        <p:spPr>
+          <a:xfrm>
+            <a:off x="3520440" y="4663440"/>
+            <a:ext cx="2377440" cy="457200"/>
+          </a:xfrm>
+          <a:prstGeom prst="rect">
+            <a:avLst/>
+          </a:prstGeom>
+          <a:noFill/>
+        </p:spPr>
+        <p:txBody>
+          <a:bodyPr wrap="square" lIns="0" rIns="0" tIns="0" bIns="0" anchor="ctr">
+            <a:spAutoFit/>
+          </a:bodyPr>
+          <a:lstStyle/>
+          <a:p>
+            <a:pPr algn="ctr"/>
+            <a:r>
+              <a:rPr sz="900" b="1" i="0">
+                <a:solidFill>
+                  <a:srgbClr val="FFFFFF"/>
+                </a:solidFill>
+                <a:latin typeface="Calibri"/>
+              </a:rPr>
+              <a:t>6. Dépose dossier</a:t>
+            </a:r>
+          </a:p>
+          <a:p>
+            <a:pPr algn="ctr"/>
+            <a:r>
+              <a:rPr sz="900" b="1" i="0">
+                <a:solidFill>
+                  <a:srgbClr val="FFFFFF"/>
+                </a:solidFill>
+                <a:latin typeface="Calibri"/>
+              </a:rPr>
+              <a:t>(à déposer)</a:t>
+            </a:r>
+          </a:p>
+        </p:txBody>
+      </p:sp>
+      <p:sp>
+        <p:nvSpPr>
+          <p:cNvPr id="35" name="Rounded Rectangle 34"/>
+          <p:cNvSpPr/>
+          <p:nvPr/>
+        </p:nvSpPr>
+        <p:spPr>
+          <a:xfrm>
+            <a:off x="685800" y="5303520"/>
+            <a:ext cx="2377440" cy="457200"/>
+          </a:xfrm>
+          <a:prstGeom prst="roundRect">
+            <a:avLst>
+              <a:gd name="adj" fmla="val 30000"/>
+            </a:avLst>
+          </a:prstGeom>
+          <a:solidFill>
+            <a:srgbClr val="F97316"/>
+          </a:solidFill>
+          <a:ln>
+            <a:noFill/>
+          </a:ln>
+          <a:effectLst/>
+        </p:spPr>
+        <p:style>
+          <a:lnRef idx="1">
+            <a:schemeClr val="accent1"/>
+          </a:lnRef>
+          <a:fillRef idx="3">
+            <a:schemeClr val="accent1"/>
+          </a:fillRef>
+          <a:effectRef idx="2">
+            <a:schemeClr val="accent1"/>
+          </a:effectRef>
+          <a:fontRef idx="minor">
+            <a:schemeClr val="lt1"/>
+          </a:fontRef>
+        </p:style>
+        <p:txBody>
+          <a:bodyPr rtlCol="0" anchor="ctr"/>
+          <a:lstStyle/>
+          <a:p>
+            <a:pPr algn="ctr"/>
+          </a:p>
+        </p:txBody>
+      </p:sp>
+      <p:sp>
+        <p:nvSpPr>
+          <p:cNvPr id="36" name="TextBox 35"/>
+          <p:cNvSpPr txBox="1"/>
+          <p:nvPr/>
+        </p:nvSpPr>
+        <p:spPr>
+          <a:xfrm>
+            <a:off x="685800" y="5303520"/>
+            <a:ext cx="2377440" cy="457200"/>
+          </a:xfrm>
+          <a:prstGeom prst="rect">
+            <a:avLst/>
+          </a:prstGeom>
+          <a:noFill/>
+        </p:spPr>
+        <p:txBody>
+          <a:bodyPr wrap="square" lIns="0" rIns="0" tIns="0" bIns="0" anchor="ctr">
+            <a:spAutoFit/>
+          </a:bodyPr>
+          <a:lstStyle/>
+          <a:p>
+            <a:pPr algn="ctr"/>
+            <a:r>
+              <a:rPr sz="900" b="1" i="0">
+                <a:solidFill>
+                  <a:srgbClr val="FFFFFF"/>
+                </a:solidFill>
+                <a:latin typeface="Calibri"/>
+              </a:rPr>
+              <a:t>7. Instruction</a:t>
+            </a:r>
+          </a:p>
+          <a:p>
+            <a:pPr algn="ctr"/>
+            <a:r>
+              <a:rPr sz="900" b="1" i="0">
+                <a:solidFill>
+                  <a:srgbClr val="FFFFFF"/>
+                </a:solidFill>
+                <a:latin typeface="Calibri"/>
+              </a:rPr>
+              <a:t>(en instruction)</a:t>
+            </a:r>
+          </a:p>
+        </p:txBody>
+      </p:sp>
+      <p:sp>
+        <p:nvSpPr>
+          <p:cNvPr id="37" name="Rounded Rectangle 36"/>
+          <p:cNvSpPr/>
+          <p:nvPr/>
+        </p:nvSpPr>
+        <p:spPr>
+          <a:xfrm>
+            <a:off x="6355080" y="5303520"/>
+            <a:ext cx="2377440" cy="457200"/>
+          </a:xfrm>
+          <a:prstGeom prst="roundRect">
+            <a:avLst>
+              <a:gd name="adj" fmla="val 30000"/>
+            </a:avLst>
+          </a:prstGeom>
+          <a:solidFill>
+            <a:srgbClr val="EF4444"/>
+          </a:solidFill>
+          <a:ln>
+            <a:noFill/>
+          </a:ln>
+          <a:effectLst/>
+        </p:spPr>
+        <p:style>
+          <a:lnRef idx="1">
+            <a:schemeClr val="accent1"/>
+          </a:lnRef>
+          <a:fillRef idx="3">
+            <a:schemeClr val="accent1"/>
+          </a:fillRef>
+          <a:effectRef idx="2">
+            <a:schemeClr val="accent1"/>
+          </a:effectRef>
+          <a:fontRef idx="minor">
+            <a:schemeClr val="lt1"/>
+          </a:fontRef>
+        </p:style>
+        <p:txBody>
+          <a:bodyPr rtlCol="0" anchor="ctr"/>
+          <a:lstStyle/>
+          <a:p>
+            <a:pPr algn="ctr"/>
+          </a:p>
+        </p:txBody>
+      </p:sp>
+      <p:sp>
+        <p:nvSpPr>
+          <p:cNvPr id="38" name="TextBox 37"/>
+          <p:cNvSpPr txBox="1"/>
+          <p:nvPr/>
+        </p:nvSpPr>
+        <p:spPr>
+          <a:xfrm>
+            <a:off x="6355080" y="5303520"/>
+            <a:ext cx="2377440" cy="457200"/>
+          </a:xfrm>
+          <a:prstGeom prst="rect">
+            <a:avLst/>
+          </a:prstGeom>
+          <a:noFill/>
+        </p:spPr>
+        <p:txBody>
+          <a:bodyPr wrap="square" lIns="0" rIns="0" tIns="0" bIns="0" anchor="ctr">
+            <a:spAutoFit/>
+          </a:bodyPr>
+          <a:lstStyle/>
+          <a:p>
+            <a:pPr algn="ctr"/>
+            <a:r>
+              <a:rPr sz="900" b="1" i="0">
+                <a:solidFill>
+                  <a:srgbClr val="FFFFFF"/>
+                </a:solidFill>
+                <a:latin typeface="Calibri"/>
+              </a:rPr>
+              <a:t>8. Compléments ?</a:t>
+            </a:r>
+          </a:p>
+          <a:p>
+            <a:pPr algn="ctr"/>
+            <a:r>
+              <a:rPr sz="900" b="1" i="0">
+                <a:solidFill>
+                  <a:srgbClr val="FFFFFF"/>
+                </a:solidFill>
+                <a:latin typeface="Calibri"/>
+              </a:rPr>
+              <a:t>(complément demandé)</a:t>
+            </a:r>
+          </a:p>
+        </p:txBody>
+      </p:sp>
+      <p:sp>
+        <p:nvSpPr>
+          <p:cNvPr id="39" name="Rounded Rectangle 38"/>
+          <p:cNvSpPr/>
+          <p:nvPr/>
+        </p:nvSpPr>
+        <p:spPr>
+          <a:xfrm>
+            <a:off x="685800" y="6035040"/>
+            <a:ext cx="2377440" cy="457200"/>
+          </a:xfrm>
+          <a:prstGeom prst="roundRect">
+            <a:avLst>
+              <a:gd name="adj" fmla="val 30000"/>
+            </a:avLst>
+          </a:prstGeom>
+          <a:solidFill>
+            <a:srgbClr val="22C55E"/>
+          </a:solidFill>
+          <a:ln>
+            <a:noFill/>
+          </a:ln>
+          <a:effectLst/>
+        </p:spPr>
+        <p:style>
+          <a:lnRef idx="1">
+            <a:schemeClr val="accent1"/>
+          </a:lnRef>
+          <a:fillRef idx="3">
+            <a:schemeClr val="accent1"/>
+          </a:fillRef>
+          <a:effectRef idx="2">
+            <a:schemeClr val="accent1"/>
+          </a:effectRef>
+          <a:fontRef idx="minor">
+            <a:schemeClr val="lt1"/>
+          </a:fontRef>
+        </p:style>
+        <p:txBody>
+          <a:bodyPr rtlCol="0" anchor="ctr"/>
+          <a:lstStyle/>
+          <a:p>
+            <a:pPr algn="ctr"/>
+          </a:p>
+        </p:txBody>
+      </p:sp>
+      <p:sp>
+        <p:nvSpPr>
+          <p:cNvPr id="40" name="TextBox 39"/>
+          <p:cNvSpPr txBox="1"/>
+          <p:nvPr/>
+        </p:nvSpPr>
+        <p:spPr>
+          <a:xfrm>
+            <a:off x="685800" y="6035040"/>
+            <a:ext cx="2377440" cy="457200"/>
+          </a:xfrm>
+          <a:prstGeom prst="rect">
+            <a:avLst/>
+          </a:prstGeom>
+          <a:noFill/>
+        </p:spPr>
+        <p:txBody>
+          <a:bodyPr wrap="square" lIns="0" rIns="0" tIns="0" bIns="0" anchor="ctr">
+            <a:spAutoFit/>
+          </a:bodyPr>
+          <a:lstStyle/>
+          <a:p>
+            <a:pPr algn="ctr"/>
+            <a:r>
+              <a:rPr sz="900" b="1" i="0">
+                <a:solidFill>
+                  <a:srgbClr val="FFFFFF"/>
+                </a:solidFill>
+                <a:latin typeface="Calibri"/>
+              </a:rPr>
+              <a:t>9. Clôturée 🎉</a:t>
+            </a:r>
+          </a:p>
+        </p:txBody>
+      </p:sp>
+      <p:cxnSp>
+        <p:nvCxnSpPr>
+          <p:cNvPr id="41" name="Connector 40"/>
+          <p:cNvCxnSpPr/>
+          <p:nvPr/>
+        </p:nvCxnSpPr>
+        <p:spPr>
+          <a:xfrm>
+            <a:off x="1874520.0" y="2331720.0"/>
+            <a:ext cx="2834640.0" cy="640080.0"/>
+          </a:xfrm>
+          <a:prstGeom prst="line">
+            <a:avLst/>
+          </a:prstGeom>
+          <a:ln w="19050">
+            <a:solidFill>
+              <a:srgbClr val="64748B"/>
+            </a:solidFill>
+            <a:tailEnd type="triangle" w="med" len="med"/>
+          </a:ln>
+        </p:spPr>
+        <p:style>
+          <a:lnRef idx="2">
+            <a:schemeClr val="accent1"/>
+          </a:lnRef>
+          <a:fillRef idx="0">
+            <a:schemeClr val="accent1"/>
+          </a:fillRef>
+          <a:effectRef idx="1">
+            <a:schemeClr val="accent1"/>
+          </a:effectRef>
+          <a:fontRef idx="minor">
+            <a:schemeClr val="tx1"/>
+          </a:fontRef>
+        </p:style>
+      </p:cxnSp>
+      <p:sp>
+        <p:nvSpPr>
+          <p:cNvPr id="42" name="TextBox 41"/>
+          <p:cNvSpPr txBox="1"/>
+          <p:nvPr/>
+        </p:nvSpPr>
+        <p:spPr>
+          <a:xfrm>
+            <a:off x="2697480" y="2523744"/>
+            <a:ext cx="1188720" cy="256032"/>
+          </a:xfrm>
+          <a:prstGeom prst="rect">
+            <a:avLst/>
+          </a:prstGeom>
+          <a:noFill/>
+        </p:spPr>
+        <p:txBody>
+          <a:bodyPr wrap="none" lIns="2" rIns="2" tIns="0" bIns="0">
+            <a:spAutoFit/>
+          </a:bodyPr>
+          <a:lstStyle/>
+          <a:p>
+            <a:pPr algn="ctr"/>
+            <a:r>
+              <a:rPr sz="800" i="1">
+                <a:solidFill>
+                  <a:srgbClr val="1E293B"/>
+                </a:solidFill>
+                <a:latin typeface="Calibri"/>
+              </a:rPr>
+              <a:t>soumet</a:t>
+            </a:r>
+          </a:p>
+        </p:txBody>
+      </p:sp>
+      <p:cxnSp>
+        <p:nvCxnSpPr>
+          <p:cNvPr id="43" name="Connector 42"/>
+          <p:cNvCxnSpPr/>
+          <p:nvPr/>
+        </p:nvCxnSpPr>
+        <p:spPr>
+          <a:xfrm>
+            <a:off x="4709160.0" y="2971800.0"/>
+            <a:ext cx="2834640.0" cy="640080.0"/>
+          </a:xfrm>
+          <a:prstGeom prst="line">
+            <a:avLst/>
+          </a:prstGeom>
+          <a:ln w="19050">
+            <a:solidFill>
+              <a:srgbClr val="64748B"/>
+            </a:solidFill>
+            <a:tailEnd type="triangle" w="med" len="med"/>
+          </a:ln>
+        </p:spPr>
+        <p:style>
+          <a:lnRef idx="2">
+            <a:schemeClr val="accent1"/>
+          </a:lnRef>
+          <a:fillRef idx="0">
+            <a:schemeClr val="accent1"/>
+          </a:fillRef>
+          <a:effectRef idx="1">
+            <a:schemeClr val="accent1"/>
+          </a:effectRef>
+          <a:fontRef idx="minor">
+            <a:schemeClr val="tx1"/>
+          </a:fontRef>
+        </p:style>
+      </p:cxnSp>
+      <p:sp>
+        <p:nvSpPr>
+          <p:cNvPr id="44" name="TextBox 43"/>
+          <p:cNvSpPr txBox="1"/>
+          <p:nvPr/>
+        </p:nvSpPr>
+        <p:spPr>
+          <a:xfrm>
+            <a:off x="5532120" y="3163824"/>
+            <a:ext cx="1188720" cy="256032"/>
+          </a:xfrm>
+          <a:prstGeom prst="rect">
+            <a:avLst/>
+          </a:prstGeom>
+          <a:noFill/>
+        </p:spPr>
+        <p:txBody>
+          <a:bodyPr wrap="none" lIns="2" rIns="2" tIns="0" bIns="0">
+            <a:spAutoFit/>
+          </a:bodyPr>
+          <a:lstStyle/>
+          <a:p>
+            <a:pPr algn="ctr"/>
+            <a:r>
+              <a:rPr sz="800" i="1">
+                <a:solidFill>
+                  <a:srgbClr val="1E293B"/>
+                </a:solidFill>
+                <a:latin typeface="Calibri"/>
+              </a:rPr>
+              <a:t>assigne</a:t>
+            </a:r>
+          </a:p>
+        </p:txBody>
+      </p:sp>
+      <p:cxnSp>
+        <p:nvCxnSpPr>
+          <p:cNvPr id="45" name="Connector 44"/>
+          <p:cNvCxnSpPr/>
+          <p:nvPr/>
+        </p:nvCxnSpPr>
+        <p:spPr>
+          <a:xfrm flipH="1">
+            <a:off x="4709160.0" y="3611880.0"/>
+            <a:ext cx="2834640.0" cy="640080.0"/>
+          </a:xfrm>
+          <a:prstGeom prst="line">
+            <a:avLst/>
+          </a:prstGeom>
+          <a:ln w="19050">
+            <a:solidFill>
+              <a:srgbClr val="64748B"/>
+            </a:solidFill>
+            <a:tailEnd type="triangle" w="med" len="med"/>
+          </a:ln>
+        </p:spPr>
+        <p:style>
+          <a:lnRef idx="2">
+            <a:schemeClr val="accent1"/>
+          </a:lnRef>
+          <a:fillRef idx="0">
+            <a:schemeClr val="accent1"/>
+          </a:fillRef>
+          <a:effectRef idx="1">
+            <a:schemeClr val="accent1"/>
+          </a:effectRef>
+          <a:fontRef idx="minor">
+            <a:schemeClr val="tx1"/>
+          </a:fontRef>
+        </p:style>
+      </p:cxnSp>
+      <p:sp>
+        <p:nvSpPr>
+          <p:cNvPr id="46" name="TextBox 45"/>
+          <p:cNvSpPr txBox="1"/>
+          <p:nvPr/>
+        </p:nvSpPr>
+        <p:spPr>
+          <a:xfrm>
+            <a:off x="5532120" y="3803904"/>
+            <a:ext cx="1188720" cy="256032"/>
+          </a:xfrm>
+          <a:prstGeom prst="rect">
+            <a:avLst/>
+          </a:prstGeom>
+          <a:noFill/>
+        </p:spPr>
+        <p:txBody>
+          <a:bodyPr wrap="none" lIns="2" rIns="2" tIns="0" bIns="0">
+            <a:spAutoFit/>
+          </a:bodyPr>
+          <a:lstStyle/>
+          <a:p>
+            <a:pPr algn="ctr"/>
+            <a:r>
+              <a:rPr sz="800" i="1">
+                <a:solidFill>
+                  <a:srgbClr val="1E293B"/>
+                </a:solidFill>
+                <a:latin typeface="Calibri"/>
+              </a:rPr>
+              <a:t>soumet relecture</a:t>
+            </a:r>
+          </a:p>
+        </p:txBody>
+      </p:sp>
+      <p:cxnSp>
+        <p:nvCxnSpPr>
+          <p:cNvPr id="47" name="Connector 46"/>
+          <p:cNvCxnSpPr/>
+          <p:nvPr/>
+        </p:nvCxnSpPr>
+        <p:spPr>
+          <a:xfrm>
+            <a:off x="4709160.0" y="4251960.0"/>
+            <a:ext cx="5669280.0" cy="0.0"/>
+          </a:xfrm>
+          <a:prstGeom prst="line">
+            <a:avLst/>
+          </a:prstGeom>
+          <a:ln w="19050">
+            <a:solidFill>
+              <a:srgbClr val="64748B"/>
+            </a:solidFill>
+            <a:tailEnd type="triangle" w="med" len="med"/>
+          </a:ln>
+        </p:spPr>
+        <p:style>
+          <a:lnRef idx="2">
+            <a:schemeClr val="accent1"/>
+          </a:lnRef>
+          <a:fillRef idx="0">
+            <a:schemeClr val="accent1"/>
+          </a:fillRef>
+          <a:effectRef idx="1">
+            <a:schemeClr val="accent1"/>
+          </a:effectRef>
+          <a:fontRef idx="minor">
+            <a:schemeClr val="tx1"/>
+          </a:fontRef>
+        </p:style>
+      </p:cxnSp>
+      <p:sp>
+        <p:nvSpPr>
+          <p:cNvPr id="48" name="TextBox 47"/>
+          <p:cNvSpPr txBox="1"/>
+          <p:nvPr/>
+        </p:nvSpPr>
+        <p:spPr>
+          <a:xfrm>
+            <a:off x="6949440" y="4123944"/>
+            <a:ext cx="1188720" cy="256032"/>
+          </a:xfrm>
+          <a:prstGeom prst="rect">
+            <a:avLst/>
+          </a:prstGeom>
+          <a:noFill/>
+        </p:spPr>
+        <p:txBody>
+          <a:bodyPr wrap="none" lIns="2" rIns="2" tIns="0" bIns="0">
+            <a:spAutoFit/>
+          </a:bodyPr>
+          <a:lstStyle/>
+          <a:p>
+            <a:pPr algn="ctr"/>
+            <a:r>
+              <a:rPr sz="800" i="1">
+                <a:solidFill>
+                  <a:srgbClr val="1E293B"/>
+                </a:solidFill>
+                <a:latin typeface="Calibri"/>
+              </a:rPr>
+              <a:t>transmet</a:t>
+            </a:r>
+          </a:p>
+        </p:txBody>
+      </p:sp>
+      <p:cxnSp>
+        <p:nvCxnSpPr>
+          <p:cNvPr id="49" name="Connector 48"/>
+          <p:cNvCxnSpPr/>
+          <p:nvPr/>
+        </p:nvCxnSpPr>
+        <p:spPr>
+          <a:xfrm flipH="1">
+            <a:off x="4709160.0" y="4251960.0"/>
+            <a:ext cx="5669280.0" cy="640080.0"/>
+          </a:xfrm>
+          <a:prstGeom prst="line">
+            <a:avLst/>
+          </a:prstGeom>
+          <a:ln w="19050">
+            <a:solidFill>
+              <a:srgbClr val="64748B"/>
+            </a:solidFill>
+            <a:tailEnd type="triangle" w="med" len="med"/>
+          </a:ln>
+        </p:spPr>
+        <p:style>
+          <a:lnRef idx="2">
+            <a:schemeClr val="accent1"/>
+          </a:lnRef>
+          <a:fillRef idx="0">
+            <a:schemeClr val="accent1"/>
+          </a:fillRef>
+          <a:effectRef idx="1">
+            <a:schemeClr val="accent1"/>
+          </a:effectRef>
+          <a:fontRef idx="minor">
+            <a:schemeClr val="tx1"/>
+          </a:fontRef>
+        </p:style>
+      </p:cxnSp>
+      <p:sp>
+        <p:nvSpPr>
+          <p:cNvPr id="50" name="TextBox 49"/>
+          <p:cNvSpPr txBox="1"/>
+          <p:nvPr/>
+        </p:nvSpPr>
+        <p:spPr>
+          <a:xfrm>
+            <a:off x="6949440" y="4443984"/>
+            <a:ext cx="1188720" cy="256032"/>
+          </a:xfrm>
+          <a:prstGeom prst="rect">
+            <a:avLst/>
+          </a:prstGeom>
+          <a:noFill/>
+        </p:spPr>
+        <p:txBody>
+          <a:bodyPr wrap="none" lIns="2" rIns="2" tIns="0" bIns="0">
+            <a:spAutoFit/>
+          </a:bodyPr>
+          <a:lstStyle/>
+          <a:p>
+            <a:pPr algn="ctr"/>
+            <a:r>
+              <a:rPr sz="800" i="1">
+                <a:solidFill>
+                  <a:srgbClr val="1E293B"/>
+                </a:solidFill>
+                <a:latin typeface="Calibri"/>
+              </a:rPr>
+              <a:t>validé</a:t>
+            </a:r>
+          </a:p>
+        </p:txBody>
+      </p:sp>
+      <p:cxnSp>
+        <p:nvCxnSpPr>
+          <p:cNvPr id="51" name="Connector 50"/>
+          <p:cNvCxnSpPr/>
+          <p:nvPr/>
+        </p:nvCxnSpPr>
+        <p:spPr>
+          <a:xfrm flipH="1">
+            <a:off x="1874520.0" y="4892040.0"/>
+            <a:ext cx="2834640.0" cy="640080.0"/>
+          </a:xfrm>
+          <a:prstGeom prst="line">
+            <a:avLst/>
+          </a:prstGeom>
+          <a:ln w="19050">
+            <a:solidFill>
+              <a:srgbClr val="64748B"/>
+            </a:solidFill>
+            <a:tailEnd type="triangle" w="med" len="med"/>
+          </a:ln>
+        </p:spPr>
+        <p:style>
+          <a:lnRef idx="2">
+            <a:schemeClr val="accent1"/>
+          </a:lnRef>
+          <a:fillRef idx="0">
+            <a:schemeClr val="accent1"/>
+          </a:fillRef>
+          <a:effectRef idx="1">
+            <a:schemeClr val="accent1"/>
+          </a:effectRef>
+          <a:fontRef idx="minor">
+            <a:schemeClr val="tx1"/>
+          </a:fontRef>
+        </p:style>
+      </p:cxnSp>
+      <p:sp>
+        <p:nvSpPr>
+          <p:cNvPr id="52" name="TextBox 51"/>
+          <p:cNvSpPr txBox="1"/>
+          <p:nvPr/>
+        </p:nvSpPr>
+        <p:spPr>
+          <a:xfrm>
+            <a:off x="2697480" y="5084064"/>
+            <a:ext cx="1188720" cy="256032"/>
+          </a:xfrm>
+          <a:prstGeom prst="rect">
+            <a:avLst/>
+          </a:prstGeom>
+          <a:noFill/>
+        </p:spPr>
+        <p:txBody>
+          <a:bodyPr wrap="none" lIns="2" rIns="2" tIns="0" bIns="0">
+            <a:spAutoFit/>
+          </a:bodyPr>
+          <a:lstStyle/>
+          <a:p>
+            <a:pPr algn="ctr"/>
+            <a:r>
+              <a:rPr sz="800" i="1">
+                <a:solidFill>
+                  <a:srgbClr val="1E293B"/>
+                </a:solidFill>
+                <a:latin typeface="Calibri"/>
+              </a:rPr>
+              <a:t>dépôt admin.</a:t>
+            </a:r>
+          </a:p>
+        </p:txBody>
+      </p:sp>
+      <p:cxnSp>
+        <p:nvCxnSpPr>
+          <p:cNvPr id="53" name="Connector 52"/>
+          <p:cNvCxnSpPr/>
+          <p:nvPr/>
+        </p:nvCxnSpPr>
+        <p:spPr>
+          <a:xfrm>
+            <a:off x="1874520.0" y="5532120.0"/>
+            <a:ext cx="5669280.0" cy="0.0"/>
+          </a:xfrm>
+          <a:prstGeom prst="line">
+            <a:avLst/>
+          </a:prstGeom>
+          <a:ln w="19050">
+            <a:solidFill>
+              <a:srgbClr val="EF4444"/>
+            </a:solidFill>
+            <a:tailEnd type="triangle" w="med" len="med"/>
+          </a:ln>
+        </p:spPr>
+        <p:style>
+          <a:lnRef idx="2">
+            <a:schemeClr val="accent1"/>
+          </a:lnRef>
+          <a:fillRef idx="0">
+            <a:schemeClr val="accent1"/>
+          </a:fillRef>
+          <a:effectRef idx="1">
+            <a:schemeClr val="accent1"/>
+          </a:effectRef>
+          <a:fontRef idx="minor">
+            <a:schemeClr val="tx1"/>
+          </a:fontRef>
+        </p:style>
+      </p:cxnSp>
+      <p:sp>
+        <p:nvSpPr>
+          <p:cNvPr id="54" name="TextBox 53"/>
+          <p:cNvSpPr txBox="1"/>
+          <p:nvPr/>
+        </p:nvSpPr>
+        <p:spPr>
+          <a:xfrm>
+            <a:off x="4114800" y="5404104"/>
+            <a:ext cx="1188720" cy="256032"/>
+          </a:xfrm>
+          <a:prstGeom prst="rect">
+            <a:avLst/>
+          </a:prstGeom>
+          <a:noFill/>
+        </p:spPr>
+        <p:txBody>
+          <a:bodyPr wrap="none" lIns="2" rIns="2" tIns="0" bIns="0">
+            <a:spAutoFit/>
+          </a:bodyPr>
+          <a:lstStyle/>
+          <a:p>
+            <a:pPr algn="ctr"/>
+            <a:r>
+              <a:rPr sz="800" i="1">
+                <a:solidFill>
+                  <a:srgbClr val="1E293B"/>
+                </a:solidFill>
+                <a:latin typeface="Calibri"/>
+              </a:rPr>
+              <a:t>si compléments</a:t>
+            </a:r>
+          </a:p>
+        </p:txBody>
+      </p:sp>
+      <p:cxnSp>
+        <p:nvCxnSpPr>
+          <p:cNvPr id="55" name="Connector 54"/>
+          <p:cNvCxnSpPr/>
+          <p:nvPr/>
+        </p:nvCxnSpPr>
+        <p:spPr>
+          <a:xfrm flipH="1">
+            <a:off x="1874520.0" y="5532120.0"/>
+            <a:ext cx="5669280.0" cy="45720.0"/>
+          </a:xfrm>
+          <a:prstGeom prst="line">
+            <a:avLst/>
+          </a:prstGeom>
+          <a:ln w="19050">
+            <a:solidFill>
+              <a:srgbClr val="EF4444"/>
+            </a:solidFill>
+            <a:tailEnd type="triangle" w="med" len="med"/>
+          </a:ln>
+        </p:spPr>
+        <p:style>
+          <a:lnRef idx="2">
+            <a:schemeClr val="accent1"/>
+          </a:lnRef>
+          <a:fillRef idx="0">
+            <a:schemeClr val="accent1"/>
+          </a:fillRef>
+          <a:effectRef idx="1">
+            <a:schemeClr val="accent1"/>
+          </a:effectRef>
+          <a:fontRef idx="minor">
+            <a:schemeClr val="tx1"/>
+          </a:fontRef>
+        </p:style>
+      </p:cxnSp>
+      <p:sp>
+        <p:nvSpPr>
+          <p:cNvPr id="56" name="TextBox 55"/>
+          <p:cNvSpPr txBox="1"/>
+          <p:nvPr/>
+        </p:nvSpPr>
+        <p:spPr>
+          <a:xfrm>
+            <a:off x="4114800" y="5426964"/>
+            <a:ext cx="1188720" cy="256032"/>
+          </a:xfrm>
+          <a:prstGeom prst="rect">
+            <a:avLst/>
+          </a:prstGeom>
+          <a:noFill/>
+        </p:spPr>
+        <p:txBody>
+          <a:bodyPr wrap="none" lIns="2" rIns="2" tIns="0" bIns="0">
+            <a:spAutoFit/>
+          </a:bodyPr>
+          <a:lstStyle/>
+          <a:p>
+            <a:pPr algn="ctr"/>
+            <a:r>
+              <a:rPr sz="800" i="1">
+                <a:solidFill>
+                  <a:srgbClr val="1E293B"/>
+                </a:solidFill>
+                <a:latin typeface="Calibri"/>
+              </a:rPr>
+              <a:t>redépôt</a:t>
+            </a:r>
+          </a:p>
+        </p:txBody>
+      </p:sp>
+      <p:cxnSp>
+        <p:nvCxnSpPr>
+          <p:cNvPr id="57" name="Connector 56"/>
+          <p:cNvCxnSpPr/>
+          <p:nvPr/>
+        </p:nvCxnSpPr>
+        <p:spPr>
+          <a:xfrm>
+            <a:off x="1874520.0" y="5532120.0"/>
+            <a:ext cx="0.0" cy="731520.0"/>
+          </a:xfrm>
+          <a:prstGeom prst="line">
+            <a:avLst/>
+          </a:prstGeom>
+          <a:ln w="19050">
+            <a:solidFill>
+              <a:srgbClr val="64748B"/>
+            </a:solidFill>
+            <a:tailEnd type="triangle" w="med" len="med"/>
+          </a:ln>
+        </p:spPr>
+        <p:style>
+          <a:lnRef idx="2">
+            <a:schemeClr val="accent1"/>
+          </a:lnRef>
+          <a:fillRef idx="0">
+            <a:schemeClr val="accent1"/>
+          </a:fillRef>
+          <a:effectRef idx="1">
+            <a:schemeClr val="accent1"/>
+          </a:effectRef>
+          <a:fontRef idx="minor">
+            <a:schemeClr val="tx1"/>
+          </a:fontRef>
+        </p:style>
+      </p:cxnSp>
+      <p:sp>
+        <p:nvSpPr>
+          <p:cNvPr id="58" name="TextBox 57"/>
+          <p:cNvSpPr txBox="1"/>
+          <p:nvPr/>
+        </p:nvSpPr>
+        <p:spPr>
+          <a:xfrm>
+            <a:off x="1280160" y="5769864"/>
+            <a:ext cx="1188720" cy="256032"/>
+          </a:xfrm>
+          <a:prstGeom prst="rect">
+            <a:avLst/>
+          </a:prstGeom>
+          <a:noFill/>
+        </p:spPr>
+        <p:txBody>
+          <a:bodyPr wrap="none" lIns="2" rIns="2" tIns="0" bIns="0">
+            <a:spAutoFit/>
+          </a:bodyPr>
+          <a:lstStyle/>
+          <a:p>
+            <a:pPr algn="ctr"/>
+            <a:r>
+              <a:rPr sz="800" i="1">
+                <a:solidFill>
+                  <a:srgbClr val="1E293B"/>
+                </a:solidFill>
+                <a:latin typeface="Calibri"/>
+              </a:rPr>
+              <a:t>OK admin.</a:t>
+            </a:r>
+          </a:p>
+        </p:txBody>
+      </p:sp>
+      <p:sp>
+        <p:nvSpPr>
+          <p:cNvPr id="59" name="TextBox 58"/>
+          <p:cNvSpPr txBox="1"/>
+          <p:nvPr/>
+        </p:nvSpPr>
+        <p:spPr>
+          <a:xfrm>
+            <a:off x="502920" y="6446520"/>
+            <a:ext cx="10972800" cy="365760"/>
+          </a:xfrm>
+          <a:prstGeom prst="rect">
+            <a:avLst/>
+          </a:prstGeom>
+          <a:noFill/>
+        </p:spPr>
+        <p:txBody>
+          <a:bodyPr wrap="square" lIns="0" rIns="0" tIns="0" bIns="0" anchor="t">
+            <a:spAutoFit/>
+          </a:bodyPr>
+          <a:lstStyle/>
+          <a:p>
+            <a:pPr algn="l"/>
+            <a:r>
+              <a:rPr sz="850" b="0" i="0">
+                <a:solidFill>
+                  <a:srgbClr val="64748B"/>
+                </a:solidFill>
+                <a:latin typeface="Calibri"/>
+              </a:rPr>
+              <a:t>Notifications in-app automatiques aux étapes clés :  « à relire » → manager  ·  « à valider » → projeteur  ·  « clôturée » → demandeur</a:t>
             </a:r>
           </a:p>
         </p:txBody>
